--- a/outputs/produkte/mama-ceo/03-praesentationen/saeule-3/03-lektion-3-3.pptx
+++ b/outputs/produkte/mama-ceo/03-praesentationen/saeule-3/03-lektion-3-3.pptx
@@ -18,7 +18,7 @@
     <p:sldId id="266" r:id="rId18"/>
     <p:sldId id="267" r:id="rId19"/>
   </p:sldIdLst>
-  <p:sldSz cx="12191695" cy="6858000" type="screen4x3"/>
+  <p:sldSz cx="9144000" cy="5143500" type="screen4x3"/>
   <p:notesSz cx="6858000" cy="9144000"/>
   <p:defaultTextStyle>
     <a:defPPr>
@@ -4285,7 +4285,7 @@
     <p:bg>
       <p:bgPr>
         <a:solidFill>
-          <a:srgbClr val="1F6F6B"/>
+          <a:srgbClr val="F1ECDD"/>
         </a:solidFill>
         <a:effectLst/>
       </p:bgPr>
@@ -4299,14 +4299,58 @@
       <p:grpSpPr/>
       <p:sp>
         <p:nvSpPr>
-          <p:cNvPr id="2" name="TextBox 1"/>
+          <p:cNvPr id="2" name="Oval 1"/>
+          <p:cNvSpPr/>
+          <p:nvPr/>
+        </p:nvSpPr>
+        <p:spPr>
+          <a:xfrm>
+            <a:off x="6858000" y="3840480"/>
+            <a:ext cx="3200400" cy="3200400"/>
+          </a:xfrm>
+          <a:prstGeom prst="ellipse">
+            <a:avLst/>
+          </a:prstGeom>
+          <a:solidFill>
+            <a:srgbClr val="DC822E"/>
+          </a:solidFill>
+          <a:ln>
+            <a:noFill/>
+          </a:ln>
+          <a:effectLst/>
+        </p:spPr>
+        <p:style>
+          <a:lnRef idx="1">
+            <a:schemeClr val="accent1"/>
+          </a:lnRef>
+          <a:fillRef idx="3">
+            <a:schemeClr val="accent1"/>
+          </a:fillRef>
+          <a:effectRef idx="2">
+            <a:schemeClr val="accent1"/>
+          </a:effectRef>
+          <a:fontRef idx="minor">
+            <a:schemeClr val="lt1"/>
+          </a:fontRef>
+        </p:style>
+        <p:txBody>
+          <a:bodyPr rtlCol="0" anchor="ctr"/>
+          <a:lstStyle/>
+          <a:p>
+            <a:pPr algn="ctr"/>
+          </a:p>
+        </p:txBody>
+      </p:sp>
+      <p:sp>
+        <p:nvSpPr>
+          <p:cNvPr id="3" name="TextBox 2"/>
           <p:cNvSpPr txBox="1"/>
           <p:nvPr/>
         </p:nvSpPr>
         <p:spPr>
           <a:xfrm>
-            <a:off x="914400" y="1920240"/>
-            <a:ext cx="10332720" cy="914400"/>
+            <a:off x="548640" y="548640"/>
+            <a:ext cx="8046720" cy="365760"/>
           </a:xfrm>
           <a:prstGeom prst="rect">
             <a:avLst/>
@@ -4319,36 +4363,72 @@
           </a:bodyPr>
           <a:lstStyle/>
           <a:p>
-            <a:pPr algn="l">
-              <a:spcBef>
-                <a:spcPts val="0"/>
-              </a:spcBef>
-              <a:spcAft>
-                <a:spcPts val="1000"/>
-              </a:spcAft>
-            </a:pPr>
-            <a:r>
-              <a:rPr sz="8000" b="1" i="0">
-                <a:solidFill>
-                  <a:srgbClr val="F1ECDD"/>
-                </a:solidFill>
-                <a:latin typeface="Georgia"/>
-              </a:rPr>
-              <a:t>3.3</a:t>
-            </a:r>
-          </a:p>
-        </p:txBody>
-      </p:sp>
-      <p:sp>
-        <p:nvSpPr>
-          <p:cNvPr id="3" name="TextBox 2"/>
+            <a:r>
+              <a:rPr sz="1100" b="1" i="0">
+                <a:solidFill>
+                  <a:srgbClr val="DC822E"/>
+                </a:solidFill>
+                <a:latin typeface="Calibri"/>
+              </a:rPr>
+              <a:t>SÄULE 3 — DU BAUST DIE STRUKTUR</a:t>
+            </a:r>
+          </a:p>
+        </p:txBody>
+      </p:sp>
+      <p:sp>
+        <p:nvSpPr>
+          <p:cNvPr id="4" name="Rectangle 3"/>
+          <p:cNvSpPr/>
+          <p:nvPr/>
+        </p:nvSpPr>
+        <p:spPr>
+          <a:xfrm>
+            <a:off x="548640" y="960120"/>
+            <a:ext cx="548640" cy="45720"/>
+          </a:xfrm>
+          <a:prstGeom prst="rect">
+            <a:avLst/>
+          </a:prstGeom>
+          <a:solidFill>
+            <a:srgbClr val="DC822E"/>
+          </a:solidFill>
+          <a:ln>
+            <a:noFill/>
+          </a:ln>
+          <a:effectLst/>
+        </p:spPr>
+        <p:style>
+          <a:lnRef idx="1">
+            <a:schemeClr val="accent1"/>
+          </a:lnRef>
+          <a:fillRef idx="3">
+            <a:schemeClr val="accent1"/>
+          </a:fillRef>
+          <a:effectRef idx="2">
+            <a:schemeClr val="accent1"/>
+          </a:effectRef>
+          <a:fontRef idx="minor">
+            <a:schemeClr val="lt1"/>
+          </a:fontRef>
+        </p:style>
+        <p:txBody>
+          <a:bodyPr rtlCol="0" anchor="ctr"/>
+          <a:lstStyle/>
+          <a:p>
+            <a:pPr algn="ctr"/>
+          </a:p>
+        </p:txBody>
+      </p:sp>
+      <p:sp>
+        <p:nvSpPr>
+          <p:cNvPr id="5" name="TextBox 4"/>
           <p:cNvSpPr txBox="1"/>
           <p:nvPr/>
         </p:nvSpPr>
         <p:spPr>
           <a:xfrm>
-            <a:off x="914400" y="2971800"/>
-            <a:ext cx="10332720" cy="1828800"/>
+            <a:off x="548640" y="1234440"/>
+            <a:ext cx="7863840" cy="1463040"/>
           </a:xfrm>
           <a:prstGeom prst="rect">
             <a:avLst/>
@@ -4361,18 +4441,10 @@
           </a:bodyPr>
           <a:lstStyle/>
           <a:p>
-            <a:pPr algn="l">
-              <a:spcBef>
-                <a:spcPts val="0"/>
-              </a:spcBef>
-              <a:spcAft>
-                <a:spcPts val="1000"/>
-              </a:spcAft>
-            </a:pPr>
             <a:r>
               <a:rPr sz="4400" b="1" i="0">
                 <a:solidFill>
-                  <a:srgbClr val="FFFFFF"/>
+                  <a:srgbClr val="1A3A4A"/>
                 </a:solidFill>
                 <a:latin typeface="Georgia"/>
               </a:rPr>
@@ -4383,14 +4455,14 @@
       </p:sp>
       <p:sp>
         <p:nvSpPr>
-          <p:cNvPr id="4" name="TextBox 3"/>
+          <p:cNvPr id="6" name="TextBox 5"/>
           <p:cNvSpPr txBox="1"/>
           <p:nvPr/>
         </p:nvSpPr>
         <p:spPr>
           <a:xfrm>
-            <a:off x="914400" y="4480560"/>
-            <a:ext cx="10332720" cy="914400"/>
+            <a:off x="548640" y="2880360"/>
+            <a:ext cx="7680960" cy="1280160"/>
           </a:xfrm>
           <a:prstGeom prst="rect">
             <a:avLst/>
@@ -4403,22 +4475,83 @@
           </a:bodyPr>
           <a:lstStyle/>
           <a:p>
-            <a:pPr algn="l">
-              <a:spcBef>
-                <a:spcPts val="0"/>
-              </a:spcBef>
-              <a:spcAft>
-                <a:spcPts val="1000"/>
-              </a:spcAft>
-            </a:pPr>
-            <a:r>
-              <a:rPr sz="2400" b="0" i="1">
-                <a:solidFill>
-                  <a:srgbClr val="F1ECDD"/>
+            <a:r>
+              <a:rPr sz="1800" b="0" i="0">
+                <a:solidFill>
+                  <a:srgbClr val="2C3E50"/>
+                </a:solidFill>
+                <a:latin typeface="Georgia"/>
+              </a:rPr>
+              <a:t>Das Fundament für deinen ganzen Content</a:t>
+            </a:r>
+          </a:p>
+        </p:txBody>
+      </p:sp>
+      <p:sp>
+        <p:nvSpPr>
+          <p:cNvPr id="7" name="TextBox 6"/>
+          <p:cNvSpPr txBox="1"/>
+          <p:nvPr/>
+        </p:nvSpPr>
+        <p:spPr>
+          <a:xfrm>
+            <a:off x="548640" y="4572000"/>
+            <a:ext cx="3657600" cy="365760"/>
+          </a:xfrm>
+          <a:prstGeom prst="rect">
+            <a:avLst/>
+          </a:prstGeom>
+          <a:noFill/>
+        </p:spPr>
+        <p:txBody>
+          <a:bodyPr wrap="square" anchor="t" lIns="0" rIns="0" tIns="0" bIns="0">
+            <a:spAutoFit/>
+          </a:bodyPr>
+          <a:lstStyle/>
+          <a:p>
+            <a:r>
+              <a:rPr sz="1200" b="1" i="0">
+                <a:solidFill>
+                  <a:srgbClr val="12828C"/>
                 </a:solidFill>
                 <a:latin typeface="Calibri"/>
               </a:rPr>
-              <a:t>Das Fundament für deinen ganzen Content</a:t>
+              <a:t>Patricia Ulmann</a:t>
+            </a:r>
+          </a:p>
+        </p:txBody>
+      </p:sp>
+      <p:sp>
+        <p:nvSpPr>
+          <p:cNvPr id="8" name="TextBox 7"/>
+          <p:cNvSpPr txBox="1"/>
+          <p:nvPr/>
+        </p:nvSpPr>
+        <p:spPr>
+          <a:xfrm>
+            <a:off x="4937760" y="4572000"/>
+            <a:ext cx="3657600" cy="365760"/>
+          </a:xfrm>
+          <a:prstGeom prst="rect">
+            <a:avLst/>
+          </a:prstGeom>
+          <a:noFill/>
+        </p:spPr>
+        <p:txBody>
+          <a:bodyPr wrap="square" anchor="t" lIns="0" rIns="0" tIns="0" bIns="0">
+            <a:spAutoFit/>
+          </a:bodyPr>
+          <a:lstStyle/>
+          <a:p>
+            <a:pPr algn="r"/>
+            <a:r>
+              <a:rPr sz="1100" b="0" i="0">
+                <a:solidFill>
+                  <a:srgbClr val="7A8A95"/>
+                </a:solidFill>
+                <a:latin typeface="Calibri"/>
+              </a:rPr>
+              <a:t>mumlifebalance.ch</a:t>
             </a:r>
           </a:p>
         </p:txBody>
@@ -4451,58 +4584,14 @@
       <p:grpSpPr/>
       <p:sp>
         <p:nvSpPr>
-          <p:cNvPr id="2" name="Rectangle 1"/>
-          <p:cNvSpPr/>
-          <p:nvPr/>
-        </p:nvSpPr>
-        <p:spPr>
-          <a:xfrm>
-            <a:off x="548640" y="502920"/>
-            <a:ext cx="201168" cy="201168"/>
-          </a:xfrm>
-          <a:prstGeom prst="rect">
-            <a:avLst/>
-          </a:prstGeom>
-          <a:solidFill>
-            <a:srgbClr val="1F6F6B"/>
-          </a:solidFill>
-          <a:ln>
-            <a:noFill/>
-          </a:ln>
-          <a:effectLst/>
-        </p:spPr>
-        <p:style>
-          <a:lnRef idx="1">
-            <a:schemeClr val="accent1"/>
-          </a:lnRef>
-          <a:fillRef idx="3">
-            <a:schemeClr val="accent1"/>
-          </a:fillRef>
-          <a:effectRef idx="2">
-            <a:schemeClr val="accent1"/>
-          </a:effectRef>
-          <a:fontRef idx="minor">
-            <a:schemeClr val="lt1"/>
-          </a:fontRef>
-        </p:style>
-        <p:txBody>
-          <a:bodyPr rtlCol="0" anchor="ctr"/>
-          <a:lstStyle/>
-          <a:p>
-            <a:pPr algn="ctr"/>
-          </a:p>
-        </p:txBody>
-      </p:sp>
-      <p:sp>
-        <p:nvSpPr>
-          <p:cNvPr id="3" name="TextBox 2"/>
+          <p:cNvPr id="2" name="TextBox 1"/>
           <p:cNvSpPr txBox="1"/>
           <p:nvPr/>
         </p:nvSpPr>
         <p:spPr>
           <a:xfrm>
-            <a:off x="868680" y="457200"/>
-            <a:ext cx="10424160" cy="1005840"/>
+            <a:off x="548640" y="457200"/>
+            <a:ext cx="8046720" cy="914400"/>
           </a:xfrm>
           <a:prstGeom prst="rect">
             <a:avLst/>
@@ -4515,22 +4604,140 @@
           </a:bodyPr>
           <a:lstStyle/>
           <a:p>
-            <a:pPr algn="l">
+            <a:r>
+              <a:rPr sz="3000" b="1" i="0">
+                <a:solidFill>
+                  <a:srgbClr val="1A3A4A"/>
+                </a:solidFill>
+                <a:latin typeface="Georgia"/>
+              </a:rPr>
+              <a:t>Beispiel: mein Notion-Jahresplan</a:t>
+            </a:r>
+          </a:p>
+        </p:txBody>
+      </p:sp>
+      <p:sp>
+        <p:nvSpPr>
+          <p:cNvPr id="3" name="TextBox 2"/>
+          <p:cNvSpPr txBox="1"/>
+          <p:nvPr/>
+        </p:nvSpPr>
+        <p:spPr>
+          <a:xfrm>
+            <a:off x="548640" y="1417320"/>
+            <a:ext cx="8046720" cy="3154680"/>
+          </a:xfrm>
+          <a:prstGeom prst="rect">
+            <a:avLst/>
+          </a:prstGeom>
+          <a:noFill/>
+        </p:spPr>
+        <p:txBody>
+          <a:bodyPr wrap="square" anchor="t" lIns="0" rIns="0" tIns="0" bIns="0">
+            <a:spAutoFit/>
+          </a:bodyPr>
+          <a:lstStyle/>
+          <a:p>
+            <a:pPr>
               <a:spcBef>
                 <a:spcPts val="0"/>
               </a:spcBef>
               <a:spcAft>
-                <a:spcPts val="1000"/>
+                <a:spcPts val="900"/>
               </a:spcAft>
             </a:pPr>
             <a:r>
-              <a:rPr sz="3200" b="1" i="0">
-                <a:solidFill>
-                  <a:srgbClr val="1F6F6B"/>
-                </a:solidFill>
-                <a:latin typeface="Georgia"/>
-              </a:rPr>
-              <a:t>Beispiel: mein Notion-Jahresplan</a:t>
+              <a:rPr sz="1600" b="1" i="0">
+                <a:solidFill>
+                  <a:srgbClr val="DC822E"/>
+                </a:solidFill>
+                <a:latin typeface="Calibri"/>
+              </a:rPr>
+              <a:t>▪  </a:t>
+            </a:r>
+            <a:r>
+              <a:rPr sz="1600" b="0" i="0">
+                <a:solidFill>
+                  <a:srgbClr val="2C3E50"/>
+                </a:solidFill>
+                <a:latin typeface="Calibri"/>
+              </a:rPr>
+              <a:t>Pro Monat: Gratis · Mini · grosses Produkt</a:t>
+            </a:r>
+          </a:p>
+          <a:p>
+            <a:pPr>
+              <a:spcBef>
+                <a:spcPts val="0"/>
+              </a:spcBef>
+              <a:spcAft>
+                <a:spcPts val="900"/>
+              </a:spcAft>
+            </a:pPr>
+            <a:r>
+              <a:rPr sz="1600" b="1" i="0">
+                <a:solidFill>
+                  <a:srgbClr val="DC822E"/>
+                </a:solidFill>
+                <a:latin typeface="Calibri"/>
+              </a:rPr>
+              <a:t>▪  </a:t>
+            </a:r>
+            <a:r>
+              <a:rPr sz="1600" b="0" i="0">
+                <a:solidFill>
+                  <a:srgbClr val="2C3E50"/>
+                </a:solidFill>
+                <a:latin typeface="Calibri"/>
+              </a:rPr>
+              <a:t>Ferien blau markiert</a:t>
+            </a:r>
+          </a:p>
+          <a:p>
+            <a:pPr>
+              <a:spcBef>
+                <a:spcPts val="0"/>
+              </a:spcBef>
+              <a:spcAft>
+                <a:spcPts val="900"/>
+              </a:spcAft>
+            </a:pPr>
+            <a:r>
+              <a:rPr sz="1600" b="1" i="0">
+                <a:solidFill>
+                  <a:srgbClr val="DC822E"/>
+                </a:solidFill>
+                <a:latin typeface="Calibri"/>
+              </a:rPr>
+              <a:t>▪  </a:t>
+            </a:r>
+            <a:r>
+              <a:rPr sz="1600" b="0" i="0">
+                <a:solidFill>
+                  <a:srgbClr val="2C3E50"/>
+                </a:solidFill>
+                <a:latin typeface="Calibri"/>
+              </a:rPr>
+              <a:t>Mum Life Balance und doTERRA farblich getrennt</a:t>
+            </a:r>
+          </a:p>
+          <a:p>
+            <a:pPr>
+              <a:spcBef>
+                <a:spcPts val="0"/>
+              </a:spcBef>
+              <a:spcAft>
+                <a:spcPts val="800"/>
+              </a:spcAft>
+            </a:pPr>
+            <a:r>
+              <a:rPr sz="1400" b="0" i="1">
+                <a:solidFill>
+                  <a:srgbClr val="7A8A95"/>
+                </a:solidFill>
+                <a:latin typeface="Calibri"/>
+              </a:rPr>
+              <a:t>Grob und ehrlich — so darf deiner auch sein. (Ich zeig dir live meinen echten Plan.)</a:t>
             </a:r>
           </a:p>
         </p:txBody>
@@ -4543,8 +4750,8 @@
         </p:nvSpPr>
         <p:spPr>
           <a:xfrm>
-            <a:off x="868680" y="1783080"/>
-            <a:ext cx="10424160" cy="4572000"/>
+            <a:off x="457200" y="4754880"/>
+            <a:ext cx="5486400" cy="274320"/>
           </a:xfrm>
           <a:prstGeom prst="rect">
             <a:avLst/>
@@ -4557,98 +4764,49 @@
           </a:bodyPr>
           <a:lstStyle/>
           <a:p>
-            <a:pPr algn="l">
-              <a:spcBef>
-                <a:spcPts val="0"/>
-              </a:spcBef>
-              <a:spcAft>
-                <a:spcPts val="1400"/>
-              </a:spcAft>
-            </a:pPr>
-            <a:r>
-              <a:rPr sz="2100" b="0" i="0">
-                <a:solidFill>
-                  <a:srgbClr val="2A2A2A"/>
+            <a:r>
+              <a:rPr sz="900" b="0" i="0">
+                <a:solidFill>
+                  <a:srgbClr val="7A8A95"/>
                 </a:solidFill>
                 <a:latin typeface="Calibri"/>
               </a:rPr>
-              <a:t>Pro Monat: Gratis · Mini · grosses Produkt</a:t>
-            </a:r>
-          </a:p>
-          <a:p>
-            <a:pPr algn="l">
-              <a:spcBef>
-                <a:spcPts val="0"/>
-              </a:spcBef>
-              <a:spcAft>
-                <a:spcPts val="1400"/>
-              </a:spcAft>
-            </a:pPr>
-            <a:r>
-              <a:rPr sz="2100" b="0" i="0">
-                <a:solidFill>
-                  <a:srgbClr val="2A2A2A"/>
+              <a:t>Mama-CEO · Säule 3 · Lektion 3.3</a:t>
+            </a:r>
+          </a:p>
+        </p:txBody>
+      </p:sp>
+      <p:sp>
+        <p:nvSpPr>
+          <p:cNvPr id="5" name="TextBox 4"/>
+          <p:cNvSpPr txBox="1"/>
+          <p:nvPr/>
+        </p:nvSpPr>
+        <p:spPr>
+          <a:xfrm>
+            <a:off x="6400800" y="4754880"/>
+            <a:ext cx="2286000" cy="274320"/>
+          </a:xfrm>
+          <a:prstGeom prst="rect">
+            <a:avLst/>
+          </a:prstGeom>
+          <a:noFill/>
+        </p:spPr>
+        <p:txBody>
+          <a:bodyPr wrap="square" anchor="t" lIns="0" rIns="0" tIns="0" bIns="0">
+            <a:spAutoFit/>
+          </a:bodyPr>
+          <a:lstStyle/>
+          <a:p>
+            <a:pPr algn="r"/>
+            <a:r>
+              <a:rPr sz="900" b="0" i="0">
+                <a:solidFill>
+                  <a:srgbClr val="7A8A95"/>
                 </a:solidFill>
                 <a:latin typeface="Calibri"/>
               </a:rPr>
-              <a:t>Ferien blau markiert</a:t>
-            </a:r>
-          </a:p>
-          <a:p>
-            <a:pPr algn="l">
-              <a:spcBef>
-                <a:spcPts val="0"/>
-              </a:spcBef>
-              <a:spcAft>
-                <a:spcPts val="1400"/>
-              </a:spcAft>
-            </a:pPr>
-            <a:r>
-              <a:rPr sz="2100" b="0" i="0">
-                <a:solidFill>
-                  <a:srgbClr val="2A2A2A"/>
-                </a:solidFill>
-                <a:latin typeface="Calibri"/>
-              </a:rPr>
-              <a:t>Mum Life Balance und doTERRA farblich getrennt</a:t>
-            </a:r>
-          </a:p>
-          <a:p>
-            <a:pPr algn="l">
-              <a:spcBef>
-                <a:spcPts val="0"/>
-              </a:spcBef>
-              <a:spcAft>
-                <a:spcPts val="1400"/>
-              </a:spcAft>
-            </a:pPr>
-            <a:r>
-              <a:rPr sz="1700" b="0" i="0">
-                <a:solidFill>
-                  <a:srgbClr val="6E6E6E"/>
-                </a:solidFill>
-                <a:latin typeface="Calibri"/>
-              </a:rPr>
-              <a:t>(hier zeige ich dir live meinen echten Jahresplan)</a:t>
-            </a:r>
-          </a:p>
-          <a:p>
-            <a:pPr algn="l">
-              <a:spcBef>
-                <a:spcPts val="0"/>
-              </a:spcBef>
-              <a:spcAft>
-                <a:spcPts val="1400"/>
-              </a:spcAft>
-            </a:pPr>
-            <a:r>
-              <a:rPr sz="2000" b="0" i="1">
-                <a:solidFill>
-                  <a:srgbClr val="6E6E6E"/>
-                </a:solidFill>
-                <a:latin typeface="Calibri"/>
-              </a:rPr>
-              <a:t>Grob und ehrlich — so darf deiner auch sein.</a:t>
+              <a:t>Mum Life Balance</a:t>
             </a:r>
           </a:p>
         </p:txBody>
@@ -4681,58 +4839,14 @@
       <p:grpSpPr/>
       <p:sp>
         <p:nvSpPr>
-          <p:cNvPr id="2" name="Rectangle 1"/>
-          <p:cNvSpPr/>
-          <p:nvPr/>
-        </p:nvSpPr>
-        <p:spPr>
-          <a:xfrm>
-            <a:off x="548640" y="502920"/>
-            <a:ext cx="201168" cy="201168"/>
-          </a:xfrm>
-          <a:prstGeom prst="rect">
-            <a:avLst/>
-          </a:prstGeom>
-          <a:solidFill>
-            <a:srgbClr val="1F6F6B"/>
-          </a:solidFill>
-          <a:ln>
-            <a:noFill/>
-          </a:ln>
-          <a:effectLst/>
-        </p:spPr>
-        <p:style>
-          <a:lnRef idx="1">
-            <a:schemeClr val="accent1"/>
-          </a:lnRef>
-          <a:fillRef idx="3">
-            <a:schemeClr val="accent1"/>
-          </a:fillRef>
-          <a:effectRef idx="2">
-            <a:schemeClr val="accent1"/>
-          </a:effectRef>
-          <a:fontRef idx="minor">
-            <a:schemeClr val="lt1"/>
-          </a:fontRef>
-        </p:style>
-        <p:txBody>
-          <a:bodyPr rtlCol="0" anchor="ctr"/>
-          <a:lstStyle/>
-          <a:p>
-            <a:pPr algn="ctr"/>
-          </a:p>
-        </p:txBody>
-      </p:sp>
-      <p:sp>
-        <p:nvSpPr>
-          <p:cNvPr id="3" name="TextBox 2"/>
+          <p:cNvPr id="2" name="TextBox 1"/>
           <p:cNvSpPr txBox="1"/>
           <p:nvPr/>
         </p:nvSpPr>
         <p:spPr>
           <a:xfrm>
-            <a:off x="868680" y="457200"/>
-            <a:ext cx="10424160" cy="1005840"/>
+            <a:off x="548640" y="457200"/>
+            <a:ext cx="8046720" cy="914400"/>
           </a:xfrm>
           <a:prstGeom prst="rect">
             <a:avLst/>
@@ -4745,7 +4859,41 @@
           </a:bodyPr>
           <a:lstStyle/>
           <a:p>
-            <a:pPr algn="l">
+            <a:r>
+              <a:rPr sz="3000" b="1" i="0">
+                <a:solidFill>
+                  <a:srgbClr val="1A3A4A"/>
+                </a:solidFill>
+                <a:latin typeface="Georgia"/>
+              </a:rPr>
+              <a:t>Was du hier NICHT machst</a:t>
+            </a:r>
+          </a:p>
+        </p:txBody>
+      </p:sp>
+      <p:sp>
+        <p:nvSpPr>
+          <p:cNvPr id="3" name="TextBox 2"/>
+          <p:cNvSpPr txBox="1"/>
+          <p:nvPr/>
+        </p:nvSpPr>
+        <p:spPr>
+          <a:xfrm>
+            <a:off x="548640" y="1417320"/>
+            <a:ext cx="8046720" cy="3154680"/>
+          </a:xfrm>
+          <a:prstGeom prst="rect">
+            <a:avLst/>
+          </a:prstGeom>
+          <a:noFill/>
+        </p:spPr>
+        <p:txBody>
+          <a:bodyPr wrap="square" anchor="t" lIns="0" rIns="0" tIns="0" bIns="0">
+            <a:spAutoFit/>
+          </a:bodyPr>
+          <a:lstStyle/>
+          <a:p>
+            <a:pPr>
               <a:spcBef>
                 <a:spcPts val="0"/>
               </a:spcBef>
@@ -4754,13 +4902,51 @@
               </a:spcAft>
             </a:pPr>
             <a:r>
-              <a:rPr sz="3200" b="1" i="0">
-                <a:solidFill>
-                  <a:srgbClr val="1F6F6B"/>
+              <a:rPr sz="2100" b="1" i="0">
+                <a:solidFill>
+                  <a:srgbClr val="1A3A4A"/>
                 </a:solidFill>
                 <a:latin typeface="Georgia"/>
               </a:rPr>
-              <a:t>Was du hier NICHT machst</a:t>
+              <a:t>Nicht alles. Nicht im Detail.</a:t>
+            </a:r>
+          </a:p>
+          <a:p>
+            <a:pPr>
+              <a:spcBef>
+                <a:spcPts val="0"/>
+              </a:spcBef>
+              <a:spcAft>
+                <a:spcPts val="900"/>
+              </a:spcAft>
+            </a:pPr>
+            <a:r>
+              <a:rPr sz="1600" b="0" i="0">
+                <a:solidFill>
+                  <a:srgbClr val="2C3E50"/>
+                </a:solidFill>
+                <a:latin typeface="Calibri"/>
+              </a:rPr>
+              <a:t>Das WIE — Reels, Captions, Umsetzung — lernst du in der Insta-Kundenmaschine.</a:t>
+            </a:r>
+          </a:p>
+          <a:p>
+            <a:pPr>
+              <a:spcBef>
+                <a:spcPts val="0"/>
+              </a:spcBef>
+              <a:spcAft>
+                <a:spcPts val="800"/>
+              </a:spcAft>
+            </a:pPr>
+            <a:r>
+              <a:rPr sz="1400" b="0" i="1">
+                <a:solidFill>
+                  <a:srgbClr val="7A8A95"/>
+                </a:solidFill>
+                <a:latin typeface="Calibri"/>
+              </a:rPr>
+              <a:t>Hier baust du nur das Fundament.</a:t>
             </a:r>
           </a:p>
         </p:txBody>
@@ -4773,8 +4959,8 @@
         </p:nvSpPr>
         <p:spPr>
           <a:xfrm>
-            <a:off x="868680" y="1783080"/>
-            <a:ext cx="10424160" cy="4572000"/>
+            <a:off x="457200" y="4754880"/>
+            <a:ext cx="5486400" cy="274320"/>
           </a:xfrm>
           <a:prstGeom prst="rect">
             <a:avLst/>
@@ -4787,60 +4973,49 @@
           </a:bodyPr>
           <a:lstStyle/>
           <a:p>
-            <a:pPr algn="l">
-              <a:spcBef>
-                <a:spcPts val="0"/>
-              </a:spcBef>
-              <a:spcAft>
-                <a:spcPts val="1400"/>
-              </a:spcAft>
-            </a:pPr>
-            <a:r>
-              <a:rPr sz="2600" b="1" i="0">
-                <a:solidFill>
-                  <a:srgbClr val="2A2A2A"/>
-                </a:solidFill>
-                <a:latin typeface="Georgia"/>
-              </a:rPr>
-              <a:t>Nicht alles. Nicht im Detail.</a:t>
-            </a:r>
-          </a:p>
-          <a:p>
-            <a:pPr algn="l">
-              <a:spcBef>
-                <a:spcPts val="0"/>
-              </a:spcBef>
-              <a:spcAft>
-                <a:spcPts val="1400"/>
-              </a:spcAft>
-            </a:pPr>
-            <a:r>
-              <a:rPr sz="2100" b="0" i="0">
-                <a:solidFill>
-                  <a:srgbClr val="2A2A2A"/>
+            <a:r>
+              <a:rPr sz="900" b="0" i="0">
+                <a:solidFill>
+                  <a:srgbClr val="7A8A95"/>
                 </a:solidFill>
                 <a:latin typeface="Calibri"/>
               </a:rPr>
-              <a:t>Das WIE — Reels, Captions, Umsetzung — lernst du in der Insta-Kundenmaschine.</a:t>
-            </a:r>
-          </a:p>
-          <a:p>
-            <a:pPr algn="l">
-              <a:spcBef>
-                <a:spcPts val="0"/>
-              </a:spcBef>
-              <a:spcAft>
-                <a:spcPts val="1400"/>
-              </a:spcAft>
-            </a:pPr>
-            <a:r>
-              <a:rPr sz="2000" b="0" i="1">
-                <a:solidFill>
-                  <a:srgbClr val="6E6E6E"/>
+              <a:t>Mama-CEO · Säule 3 · Lektion 3.3</a:t>
+            </a:r>
+          </a:p>
+        </p:txBody>
+      </p:sp>
+      <p:sp>
+        <p:nvSpPr>
+          <p:cNvPr id="5" name="TextBox 4"/>
+          <p:cNvSpPr txBox="1"/>
+          <p:nvPr/>
+        </p:nvSpPr>
+        <p:spPr>
+          <a:xfrm>
+            <a:off x="6400800" y="4754880"/>
+            <a:ext cx="2286000" cy="274320"/>
+          </a:xfrm>
+          <a:prstGeom prst="rect">
+            <a:avLst/>
+          </a:prstGeom>
+          <a:noFill/>
+        </p:spPr>
+        <p:txBody>
+          <a:bodyPr wrap="square" anchor="t" lIns="0" rIns="0" tIns="0" bIns="0">
+            <a:spAutoFit/>
+          </a:bodyPr>
+          <a:lstStyle/>
+          <a:p>
+            <a:pPr algn="r"/>
+            <a:r>
+              <a:rPr sz="900" b="0" i="0">
+                <a:solidFill>
+                  <a:srgbClr val="7A8A95"/>
                 </a:solidFill>
                 <a:latin typeface="Calibri"/>
               </a:rPr>
-              <a:t>Hier baust du nur das Fundament.</a:t>
+              <a:t>Mum Life Balance</a:t>
             </a:r>
           </a:p>
         </p:txBody>
@@ -4854,112 +5029,6 @@
 </file>
 
 <file path=ppt/slides/slide12.xml><?xml version="1.0" encoding="utf-8"?>
-<p:sld xmlns:a="http://schemas.openxmlformats.org/drawingml/2006/main" xmlns:p="http://schemas.openxmlformats.org/presentationml/2006/main" xmlns:r="http://schemas.openxmlformats.org/officeDocument/2006/relationships">
-  <p:cSld>
-    <p:bg>
-      <p:bgPr>
-        <a:solidFill>
-          <a:srgbClr val="1F6F6B"/>
-        </a:solidFill>
-        <a:effectLst/>
-      </p:bgPr>
-    </p:bg>
-    <p:spTree>
-      <p:nvGrpSpPr>
-        <p:cNvPr id="1" name=""/>
-        <p:cNvGrpSpPr/>
-        <p:nvPr/>
-      </p:nvGrpSpPr>
-      <p:grpSpPr/>
-      <p:sp>
-        <p:nvSpPr>
-          <p:cNvPr id="2" name="TextBox 1"/>
-          <p:cNvSpPr txBox="1"/>
-          <p:nvPr/>
-        </p:nvSpPr>
-        <p:spPr>
-          <a:xfrm>
-            <a:off x="1005840" y="2194560"/>
-            <a:ext cx="10149840" cy="2743200"/>
-          </a:xfrm>
-          <a:prstGeom prst="rect">
-            <a:avLst/>
-          </a:prstGeom>
-          <a:noFill/>
-        </p:spPr>
-        <p:txBody>
-          <a:bodyPr wrap="square" anchor="ctr" lIns="0" rIns="0" tIns="0" bIns="0">
-            <a:spAutoFit/>
-          </a:bodyPr>
-          <a:lstStyle/>
-          <a:p>
-            <a:pPr algn="l">
-              <a:spcBef>
-                <a:spcPts val="0"/>
-              </a:spcBef>
-              <a:spcAft>
-                <a:spcPts val="1800"/>
-              </a:spcAft>
-            </a:pPr>
-            <a:r>
-              <a:rPr sz="2200" b="0" i="0">
-                <a:solidFill>
-                  <a:srgbClr val="F1ECDD"/>
-                </a:solidFill>
-                <a:latin typeface="Calibri"/>
-              </a:rPr>
-              <a:t>📋 Im Arbeitsblatt</a:t>
-            </a:r>
-          </a:p>
-          <a:p>
-            <a:pPr algn="l">
-              <a:spcBef>
-                <a:spcPts val="0"/>
-              </a:spcBef>
-              <a:spcAft>
-                <a:spcPts val="1800"/>
-              </a:spcAft>
-            </a:pPr>
-            <a:r>
-              <a:rPr sz="3200" b="1" i="0">
-                <a:solidFill>
-                  <a:srgbClr val="FFFFFF"/>
-                </a:solidFill>
-                <a:latin typeface="Georgia"/>
-              </a:rPr>
-              <a:t>Dein Jahres-Plan: Monats-Trio + Wochen-Themen</a:t>
-            </a:r>
-          </a:p>
-          <a:p>
-            <a:pPr algn="l">
-              <a:spcBef>
-                <a:spcPts val="0"/>
-              </a:spcBef>
-              <a:spcAft>
-                <a:spcPts val="1800"/>
-              </a:spcAft>
-            </a:pPr>
-            <a:r>
-              <a:rPr sz="2200" b="0" i="0">
-                <a:solidFill>
-                  <a:srgbClr val="F1ECDD"/>
-                </a:solidFill>
-                <a:latin typeface="Calibri"/>
-              </a:rPr>
-              <a:t>Nächste Lektion: 3.4 — Monats- + Wochenplanung</a:t>
-            </a:r>
-          </a:p>
-        </p:txBody>
-      </p:sp>
-    </p:spTree>
-  </p:cSld>
-  <p:clrMapOvr>
-    <a:masterClrMapping/>
-  </p:clrMapOvr>
-</p:sld>
-</file>
-
-<file path=ppt/slides/slide2.xml><?xml version="1.0" encoding="utf-8"?>
 <p:sld xmlns:a="http://schemas.openxmlformats.org/drawingml/2006/main" xmlns:p="http://schemas.openxmlformats.org/presentationml/2006/main" xmlns:r="http://schemas.openxmlformats.org/officeDocument/2006/relationships">
   <p:cSld>
     <p:bg>
@@ -4979,20 +5048,54 @@
       <p:grpSpPr/>
       <p:sp>
         <p:nvSpPr>
-          <p:cNvPr id="2" name="Rectangle 1"/>
+          <p:cNvPr id="2" name="TextBox 1"/>
+          <p:cNvSpPr txBox="1"/>
+          <p:nvPr/>
+        </p:nvSpPr>
+        <p:spPr>
+          <a:xfrm>
+            <a:off x="548640" y="457200"/>
+            <a:ext cx="8046720" cy="822960"/>
+          </a:xfrm>
+          <a:prstGeom prst="rect">
+            <a:avLst/>
+          </a:prstGeom>
+          <a:noFill/>
+        </p:spPr>
+        <p:txBody>
+          <a:bodyPr wrap="square" anchor="t" lIns="0" rIns="0" tIns="0" bIns="0">
+            <a:spAutoFit/>
+          </a:bodyPr>
+          <a:lstStyle/>
+          <a:p>
+            <a:r>
+              <a:rPr sz="3000" b="1" i="0">
+                <a:solidFill>
+                  <a:srgbClr val="1A3A4A"/>
+                </a:solidFill>
+                <a:latin typeface="Georgia"/>
+              </a:rPr>
+              <a:t>Dein nächster Schritt</a:t>
+            </a:r>
+          </a:p>
+        </p:txBody>
+      </p:sp>
+      <p:sp>
+        <p:nvSpPr>
+          <p:cNvPr id="3" name="Rectangle 2"/>
           <p:cNvSpPr/>
           <p:nvPr/>
         </p:nvSpPr>
         <p:spPr>
           <a:xfrm>
-            <a:off x="548640" y="502920"/>
-            <a:ext cx="201168" cy="201168"/>
+            <a:off x="548640" y="1737360"/>
+            <a:ext cx="3931920" cy="2743200"/>
           </a:xfrm>
           <a:prstGeom prst="rect">
             <a:avLst/>
           </a:prstGeom>
           <a:solidFill>
-            <a:srgbClr val="1F6F6B"/>
+            <a:srgbClr val="F1ECDD"/>
           </a:solidFill>
           <a:ln>
             <a:noFill/>
@@ -5023,14 +5126,58 @@
       </p:sp>
       <p:sp>
         <p:nvSpPr>
-          <p:cNvPr id="3" name="TextBox 2"/>
+          <p:cNvPr id="4" name="Rectangle 3"/>
+          <p:cNvSpPr/>
+          <p:nvPr/>
+        </p:nvSpPr>
+        <p:spPr>
+          <a:xfrm>
+            <a:off x="548640" y="1737360"/>
+            <a:ext cx="3931920" cy="91440"/>
+          </a:xfrm>
+          <a:prstGeom prst="rect">
+            <a:avLst/>
+          </a:prstGeom>
+          <a:solidFill>
+            <a:srgbClr val="12828C"/>
+          </a:solidFill>
+          <a:ln>
+            <a:noFill/>
+          </a:ln>
+          <a:effectLst/>
+        </p:spPr>
+        <p:style>
+          <a:lnRef idx="1">
+            <a:schemeClr val="accent1"/>
+          </a:lnRef>
+          <a:fillRef idx="3">
+            <a:schemeClr val="accent1"/>
+          </a:fillRef>
+          <a:effectRef idx="2">
+            <a:schemeClr val="accent1"/>
+          </a:effectRef>
+          <a:fontRef idx="minor">
+            <a:schemeClr val="lt1"/>
+          </a:fontRef>
+        </p:style>
+        <p:txBody>
+          <a:bodyPr rtlCol="0" anchor="ctr"/>
+          <a:lstStyle/>
+          <a:p>
+            <a:pPr algn="ctr"/>
+          </a:p>
+        </p:txBody>
+      </p:sp>
+      <p:sp>
+        <p:nvSpPr>
+          <p:cNvPr id="5" name="TextBox 4"/>
           <p:cNvSpPr txBox="1"/>
           <p:nvPr/>
         </p:nvSpPr>
         <p:spPr>
           <a:xfrm>
-            <a:off x="868680" y="457200"/>
-            <a:ext cx="10424160" cy="1005840"/>
+            <a:off x="731520" y="1920240"/>
+            <a:ext cx="3657600" cy="274320"/>
           </a:xfrm>
           <a:prstGeom prst="rect">
             <a:avLst/>
@@ -5043,36 +5190,28 @@
           </a:bodyPr>
           <a:lstStyle/>
           <a:p>
-            <a:pPr algn="l">
-              <a:spcBef>
-                <a:spcPts val="0"/>
-              </a:spcBef>
-              <a:spcAft>
-                <a:spcPts val="1000"/>
-              </a:spcAft>
-            </a:pPr>
-            <a:r>
-              <a:rPr sz="3200" b="1" i="0">
-                <a:solidFill>
-                  <a:srgbClr val="1F6F6B"/>
-                </a:solidFill>
-                <a:latin typeface="Georgia"/>
-              </a:rPr>
-              <a:t>„Worüber rede ich heute?“</a:t>
-            </a:r>
-          </a:p>
-        </p:txBody>
-      </p:sp>
-      <p:sp>
-        <p:nvSpPr>
-          <p:cNvPr id="4" name="TextBox 3"/>
+            <a:r>
+              <a:rPr sz="1000" b="1" i="0">
+                <a:solidFill>
+                  <a:srgbClr val="0D6168"/>
+                </a:solidFill>
+                <a:latin typeface="Calibri"/>
+              </a:rPr>
+              <a:t>📋  ARBEITSBLATT</a:t>
+            </a:r>
+          </a:p>
+        </p:txBody>
+      </p:sp>
+      <p:sp>
+        <p:nvSpPr>
+          <p:cNvPr id="6" name="TextBox 5"/>
           <p:cNvSpPr txBox="1"/>
           <p:nvPr/>
         </p:nvSpPr>
         <p:spPr>
           <a:xfrm>
-            <a:off x="868680" y="1783080"/>
-            <a:ext cx="10424160" cy="4572000"/>
+            <a:off x="731520" y="2286000"/>
+            <a:ext cx="3657600" cy="548640"/>
           </a:xfrm>
           <a:prstGeom prst="rect">
             <a:avLst/>
@@ -5085,60 +5224,548 @@
           </a:bodyPr>
           <a:lstStyle/>
           <a:p>
-            <a:pPr algn="l">
-              <a:spcBef>
-                <a:spcPts val="0"/>
-              </a:spcBef>
-              <a:spcAft>
-                <a:spcPts val="1400"/>
-              </a:spcAft>
-            </a:pPr>
-            <a:r>
-              <a:rPr sz="2600" b="1" i="0">
-                <a:solidFill>
-                  <a:srgbClr val="2A2A2A"/>
+            <a:r>
+              <a:rPr sz="1600" b="1" i="0">
+                <a:solidFill>
+                  <a:srgbClr val="1A3A4A"/>
                 </a:solidFill>
                 <a:latin typeface="Georgia"/>
               </a:rPr>
-              <a:t>Keine Ahnung, was ich heute posten soll.</a:t>
-            </a:r>
-          </a:p>
-          <a:p>
-            <a:pPr algn="l">
-              <a:spcBef>
-                <a:spcPts val="0"/>
-              </a:spcBef>
-              <a:spcAft>
-                <a:spcPts val="1400"/>
-              </a:spcAft>
-            </a:pPr>
-            <a:r>
-              <a:rPr sz="2100" b="0" i="0">
-                <a:solidFill>
-                  <a:srgbClr val="2A2A2A"/>
+              <a:t>Dein Jahres-Plan</a:t>
+            </a:r>
+          </a:p>
+        </p:txBody>
+      </p:sp>
+      <p:sp>
+        <p:nvSpPr>
+          <p:cNvPr id="7" name="TextBox 6"/>
+          <p:cNvSpPr txBox="1"/>
+          <p:nvPr/>
+        </p:nvSpPr>
+        <p:spPr>
+          <a:xfrm>
+            <a:off x="731520" y="2880360"/>
+            <a:ext cx="3566160" cy="1463040"/>
+          </a:xfrm>
+          <a:prstGeom prst="rect">
+            <a:avLst/>
+          </a:prstGeom>
+          <a:noFill/>
+        </p:spPr>
+        <p:txBody>
+          <a:bodyPr wrap="square" anchor="t" lIns="0" rIns="0" tIns="0" bIns="0">
+            <a:spAutoFit/>
+          </a:bodyPr>
+          <a:lstStyle/>
+          <a:p>
+            <a:r>
+              <a:rPr sz="1250" b="0" i="0">
+                <a:solidFill>
+                  <a:srgbClr val="2C3E50"/>
                 </a:solidFill>
                 <a:latin typeface="Calibri"/>
               </a:rPr>
-              <a:t>Wer kennt das nicht?</a:t>
-            </a:r>
-          </a:p>
-          <a:p>
-            <a:pPr algn="l">
-              <a:spcBef>
-                <a:spcPts val="0"/>
-              </a:spcBef>
-              <a:spcAft>
-                <a:spcPts val="1400"/>
-              </a:spcAft>
-            </a:pPr>
-            <a:r>
-              <a:rPr sz="2000" b="0" i="1">
-                <a:solidFill>
-                  <a:srgbClr val="6E6E6E"/>
+              <a:t>Fülle deinen Jahres-Plan: Monats-Trio (Gratis/Mini/Gross) + Wochen-Themen. Grob reicht, er darf wachsen.</a:t>
+            </a:r>
+          </a:p>
+        </p:txBody>
+      </p:sp>
+      <p:sp>
+        <p:nvSpPr>
+          <p:cNvPr id="8" name="Rectangle 7"/>
+          <p:cNvSpPr/>
+          <p:nvPr/>
+        </p:nvSpPr>
+        <p:spPr>
+          <a:xfrm>
+            <a:off x="4663440" y="1737360"/>
+            <a:ext cx="3931920" cy="2743200"/>
+          </a:xfrm>
+          <a:prstGeom prst="rect">
+            <a:avLst/>
+          </a:prstGeom>
+          <a:solidFill>
+            <a:srgbClr val="F1ECDD"/>
+          </a:solidFill>
+          <a:ln>
+            <a:noFill/>
+          </a:ln>
+          <a:effectLst/>
+        </p:spPr>
+        <p:style>
+          <a:lnRef idx="1">
+            <a:schemeClr val="accent1"/>
+          </a:lnRef>
+          <a:fillRef idx="3">
+            <a:schemeClr val="accent1"/>
+          </a:fillRef>
+          <a:effectRef idx="2">
+            <a:schemeClr val="accent1"/>
+          </a:effectRef>
+          <a:fontRef idx="minor">
+            <a:schemeClr val="lt1"/>
+          </a:fontRef>
+        </p:style>
+        <p:txBody>
+          <a:bodyPr rtlCol="0" anchor="ctr"/>
+          <a:lstStyle/>
+          <a:p>
+            <a:pPr algn="ctr"/>
+          </a:p>
+        </p:txBody>
+      </p:sp>
+      <p:sp>
+        <p:nvSpPr>
+          <p:cNvPr id="9" name="Rectangle 8"/>
+          <p:cNvSpPr/>
+          <p:nvPr/>
+        </p:nvSpPr>
+        <p:spPr>
+          <a:xfrm>
+            <a:off x="4663440" y="1737360"/>
+            <a:ext cx="3931920" cy="91440"/>
+          </a:xfrm>
+          <a:prstGeom prst="rect">
+            <a:avLst/>
+          </a:prstGeom>
+          <a:solidFill>
+            <a:srgbClr val="DC822E"/>
+          </a:solidFill>
+          <a:ln>
+            <a:noFill/>
+          </a:ln>
+          <a:effectLst/>
+        </p:spPr>
+        <p:style>
+          <a:lnRef idx="1">
+            <a:schemeClr val="accent1"/>
+          </a:lnRef>
+          <a:fillRef idx="3">
+            <a:schemeClr val="accent1"/>
+          </a:fillRef>
+          <a:effectRef idx="2">
+            <a:schemeClr val="accent1"/>
+          </a:effectRef>
+          <a:fontRef idx="minor">
+            <a:schemeClr val="lt1"/>
+          </a:fontRef>
+        </p:style>
+        <p:txBody>
+          <a:bodyPr rtlCol="0" anchor="ctr"/>
+          <a:lstStyle/>
+          <a:p>
+            <a:pPr algn="ctr"/>
+          </a:p>
+        </p:txBody>
+      </p:sp>
+      <p:sp>
+        <p:nvSpPr>
+          <p:cNvPr id="10" name="TextBox 9"/>
+          <p:cNvSpPr txBox="1"/>
+          <p:nvPr/>
+        </p:nvSpPr>
+        <p:spPr>
+          <a:xfrm>
+            <a:off x="4846320" y="1920240"/>
+            <a:ext cx="3657600" cy="274320"/>
+          </a:xfrm>
+          <a:prstGeom prst="rect">
+            <a:avLst/>
+          </a:prstGeom>
+          <a:noFill/>
+        </p:spPr>
+        <p:txBody>
+          <a:bodyPr wrap="square" anchor="t" lIns="0" rIns="0" tIns="0" bIns="0">
+            <a:spAutoFit/>
+          </a:bodyPr>
+          <a:lstStyle/>
+          <a:p>
+            <a:r>
+              <a:rPr sz="1000" b="1" i="0">
+                <a:solidFill>
+                  <a:srgbClr val="DC822E"/>
                 </a:solidFill>
                 <a:latin typeface="Calibri"/>
               </a:rPr>
-              <a:t>Das passiert immer dann, wenn du keinen Plan hast und jeden Tag neu erfinden musst.</a:t>
+              <a:t>▶  ALS NÄCHSTES</a:t>
+            </a:r>
+          </a:p>
+        </p:txBody>
+      </p:sp>
+      <p:sp>
+        <p:nvSpPr>
+          <p:cNvPr id="11" name="TextBox 10"/>
+          <p:cNvSpPr txBox="1"/>
+          <p:nvPr/>
+        </p:nvSpPr>
+        <p:spPr>
+          <a:xfrm>
+            <a:off x="4846320" y="2286000"/>
+            <a:ext cx="3657600" cy="548640"/>
+          </a:xfrm>
+          <a:prstGeom prst="rect">
+            <a:avLst/>
+          </a:prstGeom>
+          <a:noFill/>
+        </p:spPr>
+        <p:txBody>
+          <a:bodyPr wrap="square" anchor="t" lIns="0" rIns="0" tIns="0" bIns="0">
+            <a:spAutoFit/>
+          </a:bodyPr>
+          <a:lstStyle/>
+          <a:p>
+            <a:r>
+              <a:rPr sz="1600" b="1" i="0">
+                <a:solidFill>
+                  <a:srgbClr val="1A3A4A"/>
+                </a:solidFill>
+                <a:latin typeface="Georgia"/>
+              </a:rPr>
+              <a:t>Lektion 3.4</a:t>
+            </a:r>
+          </a:p>
+        </p:txBody>
+      </p:sp>
+      <p:sp>
+        <p:nvSpPr>
+          <p:cNvPr id="12" name="TextBox 11"/>
+          <p:cNvSpPr txBox="1"/>
+          <p:nvPr/>
+        </p:nvSpPr>
+        <p:spPr>
+          <a:xfrm>
+            <a:off x="4846320" y="2880360"/>
+            <a:ext cx="3566160" cy="1463040"/>
+          </a:xfrm>
+          <a:prstGeom prst="rect">
+            <a:avLst/>
+          </a:prstGeom>
+          <a:noFill/>
+        </p:spPr>
+        <p:txBody>
+          <a:bodyPr wrap="square" anchor="t" lIns="0" rIns="0" tIns="0" bIns="0">
+            <a:spAutoFit/>
+          </a:bodyPr>
+          <a:lstStyle/>
+          <a:p>
+            <a:r>
+              <a:rPr sz="1250" b="0" i="0">
+                <a:solidFill>
+                  <a:srgbClr val="2C3E50"/>
+                </a:solidFill>
+                <a:latin typeface="Calibri"/>
+              </a:rPr>
+              <a:t>Monats- + Wochenplanung — vom Jahr runter in die konkrete Woche.</a:t>
+            </a:r>
+          </a:p>
+        </p:txBody>
+      </p:sp>
+      <p:sp>
+        <p:nvSpPr>
+          <p:cNvPr id="13" name="TextBox 12"/>
+          <p:cNvSpPr txBox="1"/>
+          <p:nvPr/>
+        </p:nvSpPr>
+        <p:spPr>
+          <a:xfrm>
+            <a:off x="457200" y="4754880"/>
+            <a:ext cx="5486400" cy="274320"/>
+          </a:xfrm>
+          <a:prstGeom prst="rect">
+            <a:avLst/>
+          </a:prstGeom>
+          <a:noFill/>
+        </p:spPr>
+        <p:txBody>
+          <a:bodyPr wrap="square" anchor="t" lIns="0" rIns="0" tIns="0" bIns="0">
+            <a:spAutoFit/>
+          </a:bodyPr>
+          <a:lstStyle/>
+          <a:p>
+            <a:r>
+              <a:rPr sz="900" b="0" i="0">
+                <a:solidFill>
+                  <a:srgbClr val="7A8A95"/>
+                </a:solidFill>
+                <a:latin typeface="Calibri"/>
+              </a:rPr>
+              <a:t>Mama-CEO · Säule 3 · Lektion 3.3</a:t>
+            </a:r>
+          </a:p>
+        </p:txBody>
+      </p:sp>
+      <p:sp>
+        <p:nvSpPr>
+          <p:cNvPr id="14" name="TextBox 13"/>
+          <p:cNvSpPr txBox="1"/>
+          <p:nvPr/>
+        </p:nvSpPr>
+        <p:spPr>
+          <a:xfrm>
+            <a:off x="6400800" y="4754880"/>
+            <a:ext cx="2286000" cy="274320"/>
+          </a:xfrm>
+          <a:prstGeom prst="rect">
+            <a:avLst/>
+          </a:prstGeom>
+          <a:noFill/>
+        </p:spPr>
+        <p:txBody>
+          <a:bodyPr wrap="square" anchor="t" lIns="0" rIns="0" tIns="0" bIns="0">
+            <a:spAutoFit/>
+          </a:bodyPr>
+          <a:lstStyle/>
+          <a:p>
+            <a:pPr algn="r"/>
+            <a:r>
+              <a:rPr sz="900" b="0" i="0">
+                <a:solidFill>
+                  <a:srgbClr val="7A8A95"/>
+                </a:solidFill>
+                <a:latin typeface="Calibri"/>
+              </a:rPr>
+              <a:t>Mum Life Balance</a:t>
+            </a:r>
+          </a:p>
+        </p:txBody>
+      </p:sp>
+    </p:spTree>
+  </p:cSld>
+  <p:clrMapOvr>
+    <a:masterClrMapping/>
+  </p:clrMapOvr>
+</p:sld>
+</file>
+
+<file path=ppt/slides/slide2.xml><?xml version="1.0" encoding="utf-8"?>
+<p:sld xmlns:a="http://schemas.openxmlformats.org/drawingml/2006/main" xmlns:p="http://schemas.openxmlformats.org/presentationml/2006/main" xmlns:r="http://schemas.openxmlformats.org/officeDocument/2006/relationships">
+  <p:cSld>
+    <p:bg>
+      <p:bgPr>
+        <a:solidFill>
+          <a:srgbClr val="12828C"/>
+        </a:solidFill>
+        <a:effectLst/>
+      </p:bgPr>
+    </p:bg>
+    <p:spTree>
+      <p:nvGrpSpPr>
+        <p:cNvPr id="1" name=""/>
+        <p:cNvGrpSpPr/>
+        <p:nvPr/>
+      </p:nvGrpSpPr>
+      <p:grpSpPr/>
+      <p:sp>
+        <p:nvSpPr>
+          <p:cNvPr id="2" name="TextBox 1"/>
+          <p:cNvSpPr txBox="1"/>
+          <p:nvPr/>
+        </p:nvSpPr>
+        <p:spPr>
+          <a:xfrm>
+            <a:off x="548640" y="1097280"/>
+            <a:ext cx="8046720" cy="365760"/>
+          </a:xfrm>
+          <a:prstGeom prst="rect">
+            <a:avLst/>
+          </a:prstGeom>
+          <a:noFill/>
+        </p:spPr>
+        <p:txBody>
+          <a:bodyPr wrap="square" anchor="t" lIns="0" rIns="0" tIns="0" bIns="0">
+            <a:spAutoFit/>
+          </a:bodyPr>
+          <a:lstStyle/>
+          <a:p>
+            <a:r>
+              <a:rPr sz="1100" b="1" i="0">
+                <a:solidFill>
+                  <a:srgbClr val="DC822E"/>
+                </a:solidFill>
+                <a:latin typeface="Calibri"/>
+              </a:rPr>
+              <a:t>WORÜBER REDE ICH HEUTE?</a:t>
+            </a:r>
+          </a:p>
+        </p:txBody>
+      </p:sp>
+      <p:sp>
+        <p:nvSpPr>
+          <p:cNvPr id="3" name="Rectangle 2"/>
+          <p:cNvSpPr/>
+          <p:nvPr/>
+        </p:nvSpPr>
+        <p:spPr>
+          <a:xfrm>
+            <a:off x="548640" y="1554480"/>
+            <a:ext cx="548640" cy="45720"/>
+          </a:xfrm>
+          <a:prstGeom prst="rect">
+            <a:avLst/>
+          </a:prstGeom>
+          <a:solidFill>
+            <a:srgbClr val="DC822E"/>
+          </a:solidFill>
+          <a:ln>
+            <a:noFill/>
+          </a:ln>
+          <a:effectLst/>
+        </p:spPr>
+        <p:style>
+          <a:lnRef idx="1">
+            <a:schemeClr val="accent1"/>
+          </a:lnRef>
+          <a:fillRef idx="3">
+            <a:schemeClr val="accent1"/>
+          </a:fillRef>
+          <a:effectRef idx="2">
+            <a:schemeClr val="accent1"/>
+          </a:effectRef>
+          <a:fontRef idx="minor">
+            <a:schemeClr val="lt1"/>
+          </a:fontRef>
+        </p:style>
+        <p:txBody>
+          <a:bodyPr rtlCol="0" anchor="ctr"/>
+          <a:lstStyle/>
+          <a:p>
+            <a:pPr algn="ctr"/>
+          </a:p>
+        </p:txBody>
+      </p:sp>
+      <p:sp>
+        <p:nvSpPr>
+          <p:cNvPr id="4" name="TextBox 3"/>
+          <p:cNvSpPr txBox="1"/>
+          <p:nvPr/>
+        </p:nvSpPr>
+        <p:spPr>
+          <a:xfrm>
+            <a:off x="548640" y="1920240"/>
+            <a:ext cx="8046720" cy="2194560"/>
+          </a:xfrm>
+          <a:prstGeom prst="rect">
+            <a:avLst/>
+          </a:prstGeom>
+          <a:noFill/>
+        </p:spPr>
+        <p:txBody>
+          <a:bodyPr wrap="square" anchor="t" lIns="0" rIns="0" tIns="0" bIns="0">
+            <a:spAutoFit/>
+          </a:bodyPr>
+          <a:lstStyle/>
+          <a:p>
+            <a:r>
+              <a:rPr sz="3200" b="1" i="0">
+                <a:solidFill>
+                  <a:srgbClr val="F1ECDD"/>
+                </a:solidFill>
+                <a:latin typeface="Georgia"/>
+              </a:rPr>
+              <a:t>„Keine Ahnung, was ich heute posten soll.“</a:t>
+            </a:r>
+          </a:p>
+        </p:txBody>
+      </p:sp>
+      <p:sp>
+        <p:nvSpPr>
+          <p:cNvPr id="5" name="TextBox 4"/>
+          <p:cNvSpPr txBox="1"/>
+          <p:nvPr/>
+        </p:nvSpPr>
+        <p:spPr>
+          <a:xfrm>
+            <a:off x="548640" y="3703320"/>
+            <a:ext cx="8046720" cy="731520"/>
+          </a:xfrm>
+          <a:prstGeom prst="rect">
+            <a:avLst/>
+          </a:prstGeom>
+          <a:noFill/>
+        </p:spPr>
+        <p:txBody>
+          <a:bodyPr wrap="square" anchor="t" lIns="0" rIns="0" tIns="0" bIns="0">
+            <a:spAutoFit/>
+          </a:bodyPr>
+          <a:lstStyle/>
+          <a:p>
+            <a:r>
+              <a:rPr sz="1500" b="0" i="1">
+                <a:solidFill>
+                  <a:srgbClr val="F1ECDD"/>
+                </a:solidFill>
+                <a:latin typeface="Calibri"/>
+              </a:rPr>
+              <a:t>Wer kennt's? Genau das räumen wir weg.</a:t>
+            </a:r>
+          </a:p>
+        </p:txBody>
+      </p:sp>
+      <p:sp>
+        <p:nvSpPr>
+          <p:cNvPr id="6" name="TextBox 5"/>
+          <p:cNvSpPr txBox="1"/>
+          <p:nvPr/>
+        </p:nvSpPr>
+        <p:spPr>
+          <a:xfrm>
+            <a:off x="457200" y="4754880"/>
+            <a:ext cx="5486400" cy="274320"/>
+          </a:xfrm>
+          <a:prstGeom prst="rect">
+            <a:avLst/>
+          </a:prstGeom>
+          <a:noFill/>
+        </p:spPr>
+        <p:txBody>
+          <a:bodyPr wrap="square" anchor="t" lIns="0" rIns="0" tIns="0" bIns="0">
+            <a:spAutoFit/>
+          </a:bodyPr>
+          <a:lstStyle/>
+          <a:p>
+            <a:r>
+              <a:rPr sz="900" b="0" i="0">
+                <a:solidFill>
+                  <a:srgbClr val="F1ECDD"/>
+                </a:solidFill>
+                <a:latin typeface="Calibri"/>
+              </a:rPr>
+              <a:t>Mama-CEO · Säule 3 · Lektion 3.3</a:t>
+            </a:r>
+          </a:p>
+        </p:txBody>
+      </p:sp>
+      <p:sp>
+        <p:nvSpPr>
+          <p:cNvPr id="7" name="TextBox 6"/>
+          <p:cNvSpPr txBox="1"/>
+          <p:nvPr/>
+        </p:nvSpPr>
+        <p:spPr>
+          <a:xfrm>
+            <a:off x="6400800" y="4754880"/>
+            <a:ext cx="2286000" cy="274320"/>
+          </a:xfrm>
+          <a:prstGeom prst="rect">
+            <a:avLst/>
+          </a:prstGeom>
+          <a:noFill/>
+        </p:spPr>
+        <p:txBody>
+          <a:bodyPr wrap="square" anchor="t" lIns="0" rIns="0" tIns="0" bIns="0">
+            <a:spAutoFit/>
+          </a:bodyPr>
+          <a:lstStyle/>
+          <a:p>
+            <a:pPr algn="r"/>
+            <a:r>
+              <a:rPr sz="900" b="0" i="0">
+                <a:solidFill>
+                  <a:srgbClr val="F1ECDD"/>
+                </a:solidFill>
+                <a:latin typeface="Calibri"/>
+              </a:rPr>
+              <a:t>Mum Life Balance</a:t>
             </a:r>
           </a:p>
         </p:txBody>
@@ -5171,58 +5798,14 @@
       <p:grpSpPr/>
       <p:sp>
         <p:nvSpPr>
-          <p:cNvPr id="2" name="Rectangle 1"/>
-          <p:cNvSpPr/>
-          <p:nvPr/>
-        </p:nvSpPr>
-        <p:spPr>
-          <a:xfrm>
-            <a:off x="548640" y="502920"/>
-            <a:ext cx="201168" cy="201168"/>
-          </a:xfrm>
-          <a:prstGeom prst="rect">
-            <a:avLst/>
-          </a:prstGeom>
-          <a:solidFill>
-            <a:srgbClr val="1F6F6B"/>
-          </a:solidFill>
-          <a:ln>
-            <a:noFill/>
-          </a:ln>
-          <a:effectLst/>
-        </p:spPr>
-        <p:style>
-          <a:lnRef idx="1">
-            <a:schemeClr val="accent1"/>
-          </a:lnRef>
-          <a:fillRef idx="3">
-            <a:schemeClr val="accent1"/>
-          </a:fillRef>
-          <a:effectRef idx="2">
-            <a:schemeClr val="accent1"/>
-          </a:effectRef>
-          <a:fontRef idx="minor">
-            <a:schemeClr val="lt1"/>
-          </a:fontRef>
-        </p:style>
-        <p:txBody>
-          <a:bodyPr rtlCol="0" anchor="ctr"/>
-          <a:lstStyle/>
-          <a:p>
-            <a:pPr algn="ctr"/>
-          </a:p>
-        </p:txBody>
-      </p:sp>
-      <p:sp>
-        <p:nvSpPr>
-          <p:cNvPr id="3" name="TextBox 2"/>
+          <p:cNvPr id="2" name="TextBox 1"/>
           <p:cNvSpPr txBox="1"/>
           <p:nvPr/>
         </p:nvSpPr>
         <p:spPr>
           <a:xfrm>
-            <a:off x="868680" y="457200"/>
-            <a:ext cx="10424160" cy="1005840"/>
+            <a:off x="548640" y="457200"/>
+            <a:ext cx="8046720" cy="914400"/>
           </a:xfrm>
           <a:prstGeom prst="rect">
             <a:avLst/>
@@ -5235,22 +5818,113 @@
           </a:bodyPr>
           <a:lstStyle/>
           <a:p>
-            <a:pPr algn="l">
+            <a:r>
+              <a:rPr sz="3000" b="1" i="0">
+                <a:solidFill>
+                  <a:srgbClr val="1A3A4A"/>
+                </a:solidFill>
+                <a:latin typeface="Georgia"/>
+              </a:rPr>
+              <a:t>Reagieren vs. Führen</a:t>
+            </a:r>
+          </a:p>
+        </p:txBody>
+      </p:sp>
+      <p:sp>
+        <p:nvSpPr>
+          <p:cNvPr id="3" name="TextBox 2"/>
+          <p:cNvSpPr txBox="1"/>
+          <p:nvPr/>
+        </p:nvSpPr>
+        <p:spPr>
+          <a:xfrm>
+            <a:off x="548640" y="1417320"/>
+            <a:ext cx="8046720" cy="3154680"/>
+          </a:xfrm>
+          <a:prstGeom prst="rect">
+            <a:avLst/>
+          </a:prstGeom>
+          <a:noFill/>
+        </p:spPr>
+        <p:txBody>
+          <a:bodyPr wrap="square" anchor="t" lIns="0" rIns="0" tIns="0" bIns="0">
+            <a:spAutoFit/>
+          </a:bodyPr>
+          <a:lstStyle/>
+          <a:p>
+            <a:pPr>
               <a:spcBef>
                 <a:spcPts val="0"/>
               </a:spcBef>
               <a:spcAft>
-                <a:spcPts val="1000"/>
+                <a:spcPts val="400"/>
               </a:spcAft>
             </a:pPr>
             <a:r>
-              <a:rPr sz="3200" b="1" i="0">
-                <a:solidFill>
-                  <a:srgbClr val="1F6F6B"/>
-                </a:solidFill>
-                <a:latin typeface="Georgia"/>
-              </a:rPr>
-              <a:t>Reagieren vs. Führen</a:t>
+              <a:rPr sz="1600" b="1" i="0">
+                <a:solidFill>
+                  <a:srgbClr val="DC822E"/>
+                </a:solidFill>
+                <a:latin typeface="Calibri"/>
+              </a:rPr>
+              <a:t>REAGIEREN</a:t>
+            </a:r>
+          </a:p>
+          <a:p>
+            <a:pPr>
+              <a:spcBef>
+                <a:spcPts val="0"/>
+              </a:spcBef>
+              <a:spcAft>
+                <a:spcPts val="900"/>
+              </a:spcAft>
+            </a:pPr>
+            <a:r>
+              <a:rPr sz="1600" b="0" i="0">
+                <a:solidFill>
+                  <a:srgbClr val="2C3E50"/>
+                </a:solidFill>
+                <a:latin typeface="Calibri"/>
+              </a:rPr>
+              <a:t>Tag zu Tag · Bauchgefühl · nichts Grosses bewegt sich</a:t>
+            </a:r>
+          </a:p>
+          <a:p>
+            <a:pPr>
+              <a:spcBef>
+                <a:spcPts val="0"/>
+              </a:spcBef>
+              <a:spcAft>
+                <a:spcPts val="400"/>
+              </a:spcAft>
+            </a:pPr>
+            <a:r>
+              <a:rPr sz="1600" b="1" i="0">
+                <a:solidFill>
+                  <a:srgbClr val="DC822E"/>
+                </a:solidFill>
+                <a:latin typeface="Calibri"/>
+              </a:rPr>
+              <a:t>FÜHREN</a:t>
+            </a:r>
+          </a:p>
+          <a:p>
+            <a:pPr>
+              <a:spcBef>
+                <a:spcPts val="0"/>
+              </a:spcBef>
+              <a:spcAft>
+                <a:spcPts val="900"/>
+              </a:spcAft>
+            </a:pPr>
+            <a:r>
+              <a:rPr sz="1600" b="0" i="0">
+                <a:solidFill>
+                  <a:srgbClr val="2C3E50"/>
+                </a:solidFill>
+                <a:latin typeface="Calibri"/>
+              </a:rPr>
+              <a:t>Jahresblick · du entscheidest · das ist Mama-CEO</a:t>
             </a:r>
           </a:p>
         </p:txBody>
@@ -5263,8 +5937,8 @@
         </p:nvSpPr>
         <p:spPr>
           <a:xfrm>
-            <a:off x="868680" y="1783080"/>
-            <a:ext cx="10424160" cy="4572000"/>
+            <a:off x="457200" y="4754880"/>
+            <a:ext cx="5486400" cy="274320"/>
           </a:xfrm>
           <a:prstGeom prst="rect">
             <a:avLst/>
@@ -5277,79 +5951,49 @@
           </a:bodyPr>
           <a:lstStyle/>
           <a:p>
-            <a:pPr algn="l">
-              <a:spcBef>
-                <a:spcPts val="0"/>
-              </a:spcBef>
-              <a:spcAft>
-                <a:spcPts val="1400"/>
-              </a:spcAft>
-            </a:pPr>
-            <a:r>
-              <a:rPr sz="2600" b="1" i="0">
-                <a:solidFill>
-                  <a:srgbClr val="2A2A2A"/>
-                </a:solidFill>
-                <a:latin typeface="Georgia"/>
-              </a:rPr>
-              <a:t>REAGIEREN</a:t>
-            </a:r>
-          </a:p>
-          <a:p>
-            <a:pPr algn="l">
-              <a:spcBef>
-                <a:spcPts val="0"/>
-              </a:spcBef>
-              <a:spcAft>
-                <a:spcPts val="1400"/>
-              </a:spcAft>
-            </a:pPr>
-            <a:r>
-              <a:rPr sz="2100" b="0" i="0">
-                <a:solidFill>
-                  <a:srgbClr val="2A2A2A"/>
+            <a:r>
+              <a:rPr sz="900" b="0" i="0">
+                <a:solidFill>
+                  <a:srgbClr val="7A8A95"/>
                 </a:solidFill>
                 <a:latin typeface="Calibri"/>
               </a:rPr>
-              <a:t>Tag zu Tag · Bauchgefühl · nichts Grosses bewegt sich</a:t>
-            </a:r>
-          </a:p>
-          <a:p>
-            <a:pPr algn="l">
-              <a:spcBef>
-                <a:spcPts val="0"/>
-              </a:spcBef>
-              <a:spcAft>
-                <a:spcPts val="1400"/>
-              </a:spcAft>
-            </a:pPr>
-            <a:r>
-              <a:rPr sz="2600" b="1" i="0">
-                <a:solidFill>
-                  <a:srgbClr val="2A2A2A"/>
-                </a:solidFill>
-                <a:latin typeface="Georgia"/>
-              </a:rPr>
-              <a:t>FÜHREN</a:t>
-            </a:r>
-          </a:p>
-          <a:p>
-            <a:pPr algn="l">
-              <a:spcBef>
-                <a:spcPts val="0"/>
-              </a:spcBef>
-              <a:spcAft>
-                <a:spcPts val="1400"/>
-              </a:spcAft>
-            </a:pPr>
-            <a:r>
-              <a:rPr sz="2100" b="0" i="0">
-                <a:solidFill>
-                  <a:srgbClr val="2A2A2A"/>
+              <a:t>Mama-CEO · Säule 3 · Lektion 3.3</a:t>
+            </a:r>
+          </a:p>
+        </p:txBody>
+      </p:sp>
+      <p:sp>
+        <p:nvSpPr>
+          <p:cNvPr id="5" name="TextBox 4"/>
+          <p:cNvSpPr txBox="1"/>
+          <p:nvPr/>
+        </p:nvSpPr>
+        <p:spPr>
+          <a:xfrm>
+            <a:off x="6400800" y="4754880"/>
+            <a:ext cx="2286000" cy="274320"/>
+          </a:xfrm>
+          <a:prstGeom prst="rect">
+            <a:avLst/>
+          </a:prstGeom>
+          <a:noFill/>
+        </p:spPr>
+        <p:txBody>
+          <a:bodyPr wrap="square" anchor="t" lIns="0" rIns="0" tIns="0" bIns="0">
+            <a:spAutoFit/>
+          </a:bodyPr>
+          <a:lstStyle/>
+          <a:p>
+            <a:pPr algn="r"/>
+            <a:r>
+              <a:rPr sz="900" b="0" i="0">
+                <a:solidFill>
+                  <a:srgbClr val="7A8A95"/>
                 </a:solidFill>
                 <a:latin typeface="Calibri"/>
               </a:rPr>
-              <a:t>Jahresblick · du entscheidest · das ist Mama-CEO</a:t>
+              <a:t>Mum Life Balance</a:t>
             </a:r>
           </a:p>
         </p:txBody>
@@ -5382,58 +6026,14 @@
       <p:grpSpPr/>
       <p:sp>
         <p:nvSpPr>
-          <p:cNvPr id="2" name="Rectangle 1"/>
-          <p:cNvSpPr/>
-          <p:nvPr/>
-        </p:nvSpPr>
-        <p:spPr>
-          <a:xfrm>
-            <a:off x="548640" y="502920"/>
-            <a:ext cx="201168" cy="201168"/>
-          </a:xfrm>
-          <a:prstGeom prst="rect">
-            <a:avLst/>
-          </a:prstGeom>
-          <a:solidFill>
-            <a:srgbClr val="1F6F6B"/>
-          </a:solidFill>
-          <a:ln>
-            <a:noFill/>
-          </a:ln>
-          <a:effectLst/>
-        </p:spPr>
-        <p:style>
-          <a:lnRef idx="1">
-            <a:schemeClr val="accent1"/>
-          </a:lnRef>
-          <a:fillRef idx="3">
-            <a:schemeClr val="accent1"/>
-          </a:fillRef>
-          <a:effectRef idx="2">
-            <a:schemeClr val="accent1"/>
-          </a:effectRef>
-          <a:fontRef idx="minor">
-            <a:schemeClr val="lt1"/>
-          </a:fontRef>
-        </p:style>
-        <p:txBody>
-          <a:bodyPr rtlCol="0" anchor="ctr"/>
-          <a:lstStyle/>
-          <a:p>
-            <a:pPr algn="ctr"/>
-          </a:p>
-        </p:txBody>
-      </p:sp>
-      <p:sp>
-        <p:nvSpPr>
-          <p:cNvPr id="3" name="TextBox 2"/>
+          <p:cNvPr id="2" name="TextBox 1"/>
           <p:cNvSpPr txBox="1"/>
           <p:nvPr/>
         </p:nvSpPr>
         <p:spPr>
           <a:xfrm>
-            <a:off x="868680" y="457200"/>
-            <a:ext cx="10424160" cy="1005840"/>
+            <a:off x="548640" y="457200"/>
+            <a:ext cx="8046720" cy="822960"/>
           </a:xfrm>
           <a:prstGeom prst="rect">
             <a:avLst/>
@@ -5446,18 +6046,10 @@
           </a:bodyPr>
           <a:lstStyle/>
           <a:p>
-            <a:pPr algn="l">
-              <a:spcBef>
-                <a:spcPts val="0"/>
-              </a:spcBef>
-              <a:spcAft>
-                <a:spcPts val="1000"/>
-              </a:spcAft>
-            </a:pPr>
-            <a:r>
-              <a:rPr sz="3200" b="1" i="0">
-                <a:solidFill>
-                  <a:srgbClr val="1F6F6B"/>
+            <a:r>
+              <a:rPr sz="3000" b="1" i="0">
+                <a:solidFill>
+                  <a:srgbClr val="1A3A4A"/>
                 </a:solidFill>
                 <a:latin typeface="Georgia"/>
               </a:rPr>
@@ -5468,14 +6060,14 @@
       </p:sp>
       <p:sp>
         <p:nvSpPr>
-          <p:cNvPr id="4" name="TextBox 3"/>
+          <p:cNvPr id="3" name="TextBox 2"/>
           <p:cNvSpPr txBox="1"/>
           <p:nvPr/>
         </p:nvSpPr>
         <p:spPr>
           <a:xfrm>
-            <a:off x="868680" y="1783080"/>
-            <a:ext cx="10424160" cy="4572000"/>
+            <a:off x="548640" y="1188720"/>
+            <a:ext cx="8046720" cy="457200"/>
           </a:xfrm>
           <a:prstGeom prst="rect">
             <a:avLst/>
@@ -5488,60 +6080,219 @@
           </a:bodyPr>
           <a:lstStyle/>
           <a:p>
-            <a:pPr algn="l">
-              <a:spcBef>
-                <a:spcPts val="0"/>
-              </a:spcBef>
-              <a:spcAft>
-                <a:spcPts val="1400"/>
-              </a:spcAft>
-            </a:pPr>
-            <a:r>
-              <a:rPr sz="2600" b="1" i="0">
-                <a:solidFill>
-                  <a:srgbClr val="2A2A2A"/>
+            <a:r>
+              <a:rPr sz="1300" b="0" i="0">
+                <a:solidFill>
+                  <a:srgbClr val="7A8A95"/>
+                </a:solidFill>
+                <a:latin typeface="Calibri"/>
+              </a:rPr>
+              <a:t>Zwei Fragen — mehr brauchst du nicht.</a:t>
+            </a:r>
+          </a:p>
+        </p:txBody>
+      </p:sp>
+      <p:sp>
+        <p:nvSpPr>
+          <p:cNvPr id="4" name="TextBox 3"/>
+          <p:cNvSpPr txBox="1"/>
+          <p:nvPr/>
+        </p:nvSpPr>
+        <p:spPr>
+          <a:xfrm>
+            <a:off x="548640" y="1828800"/>
+            <a:ext cx="822960" cy="640080"/>
+          </a:xfrm>
+          <a:prstGeom prst="rect">
+            <a:avLst/>
+          </a:prstGeom>
+          <a:noFill/>
+        </p:spPr>
+        <p:txBody>
+          <a:bodyPr wrap="square" anchor="t" lIns="0" rIns="0" tIns="0" bIns="0">
+            <a:spAutoFit/>
+          </a:bodyPr>
+          <a:lstStyle/>
+          <a:p>
+            <a:r>
+              <a:rPr sz="2800" b="1" i="0">
+                <a:solidFill>
+                  <a:srgbClr val="DC822E"/>
                 </a:solidFill>
                 <a:latin typeface="Georgia"/>
               </a:rPr>
-              <a:t>1.  WAS bewerbe ich WANN?</a:t>
-            </a:r>
-          </a:p>
-          <a:p>
-            <a:pPr algn="l">
-              <a:spcBef>
-                <a:spcPts val="0"/>
-              </a:spcBef>
-              <a:spcAft>
-                <a:spcPts val="1400"/>
-              </a:spcAft>
-            </a:pPr>
-            <a:r>
-              <a:rPr sz="2600" b="1" i="0">
-                <a:solidFill>
-                  <a:srgbClr val="2A2A2A"/>
+              <a:t>01</a:t>
+            </a:r>
+          </a:p>
+        </p:txBody>
+      </p:sp>
+      <p:sp>
+        <p:nvSpPr>
+          <p:cNvPr id="5" name="TextBox 4"/>
+          <p:cNvSpPr txBox="1"/>
+          <p:nvPr/>
+        </p:nvSpPr>
+        <p:spPr>
+          <a:xfrm>
+            <a:off x="1371600" y="1865376"/>
+            <a:ext cx="7223760" cy="713232"/>
+          </a:xfrm>
+          <a:prstGeom prst="rect">
+            <a:avLst/>
+          </a:prstGeom>
+          <a:noFill/>
+        </p:spPr>
+        <p:txBody>
+          <a:bodyPr wrap="square" anchor="t" lIns="0" rIns="0" tIns="0" bIns="0">
+            <a:spAutoFit/>
+          </a:bodyPr>
+          <a:lstStyle/>
+          <a:p>
+            <a:r>
+              <a:rPr sz="1600" b="1" i="0">
+                <a:solidFill>
+                  <a:srgbClr val="2C3E50"/>
+                </a:solidFill>
+                <a:latin typeface="Calibri"/>
+              </a:rPr>
+              <a:t>WAS bewerbe ich WANN?</a:t>
+            </a:r>
+          </a:p>
+        </p:txBody>
+      </p:sp>
+      <p:sp>
+        <p:nvSpPr>
+          <p:cNvPr id="6" name="TextBox 5"/>
+          <p:cNvSpPr txBox="1"/>
+          <p:nvPr/>
+        </p:nvSpPr>
+        <p:spPr>
+          <a:xfrm>
+            <a:off x="548640" y="2542032"/>
+            <a:ext cx="822960" cy="640080"/>
+          </a:xfrm>
+          <a:prstGeom prst="rect">
+            <a:avLst/>
+          </a:prstGeom>
+          <a:noFill/>
+        </p:spPr>
+        <p:txBody>
+          <a:bodyPr wrap="square" anchor="t" lIns="0" rIns="0" tIns="0" bIns="0">
+            <a:spAutoFit/>
+          </a:bodyPr>
+          <a:lstStyle/>
+          <a:p>
+            <a:r>
+              <a:rPr sz="2800" b="1" i="0">
+                <a:solidFill>
+                  <a:srgbClr val="DC822E"/>
                 </a:solidFill>
                 <a:latin typeface="Georgia"/>
               </a:rPr>
-              <a:t>2.  Über WELCHE Transformation rede ich WANN?</a:t>
-            </a:r>
-          </a:p>
-          <a:p>
-            <a:pPr algn="l">
-              <a:spcBef>
-                <a:spcPts val="0"/>
-              </a:spcBef>
-              <a:spcAft>
-                <a:spcPts val="1400"/>
-              </a:spcAft>
-            </a:pPr>
-            <a:r>
-              <a:rPr sz="2000" b="0" i="1">
-                <a:solidFill>
-                  <a:srgbClr val="6E6E6E"/>
+              <a:t>02</a:t>
+            </a:r>
+          </a:p>
+        </p:txBody>
+      </p:sp>
+      <p:sp>
+        <p:nvSpPr>
+          <p:cNvPr id="7" name="TextBox 6"/>
+          <p:cNvSpPr txBox="1"/>
+          <p:nvPr/>
+        </p:nvSpPr>
+        <p:spPr>
+          <a:xfrm>
+            <a:off x="1371600" y="2578608"/>
+            <a:ext cx="7223760" cy="713232"/>
+          </a:xfrm>
+          <a:prstGeom prst="rect">
+            <a:avLst/>
+          </a:prstGeom>
+          <a:noFill/>
+        </p:spPr>
+        <p:txBody>
+          <a:bodyPr wrap="square" anchor="t" lIns="0" rIns="0" tIns="0" bIns="0">
+            <a:spAutoFit/>
+          </a:bodyPr>
+          <a:lstStyle/>
+          <a:p>
+            <a:r>
+              <a:rPr sz="1600" b="1" i="0">
+                <a:solidFill>
+                  <a:srgbClr val="2C3E50"/>
                 </a:solidFill>
                 <a:latin typeface="Calibri"/>
               </a:rPr>
-              <a:t>Beantworte die zwei — dein Content schreibt sich fast von selbst.</a:t>
+              <a:t>Über WELCHE Transformation rede ich WANN?</a:t>
+            </a:r>
+          </a:p>
+        </p:txBody>
+      </p:sp>
+      <p:sp>
+        <p:nvSpPr>
+          <p:cNvPr id="8" name="TextBox 7"/>
+          <p:cNvSpPr txBox="1"/>
+          <p:nvPr/>
+        </p:nvSpPr>
+        <p:spPr>
+          <a:xfrm>
+            <a:off x="457200" y="4754880"/>
+            <a:ext cx="5486400" cy="274320"/>
+          </a:xfrm>
+          <a:prstGeom prst="rect">
+            <a:avLst/>
+          </a:prstGeom>
+          <a:noFill/>
+        </p:spPr>
+        <p:txBody>
+          <a:bodyPr wrap="square" anchor="t" lIns="0" rIns="0" tIns="0" bIns="0">
+            <a:spAutoFit/>
+          </a:bodyPr>
+          <a:lstStyle/>
+          <a:p>
+            <a:r>
+              <a:rPr sz="900" b="0" i="0">
+                <a:solidFill>
+                  <a:srgbClr val="7A8A95"/>
+                </a:solidFill>
+                <a:latin typeface="Calibri"/>
+              </a:rPr>
+              <a:t>Mama-CEO · Säule 3 · Lektion 3.3</a:t>
+            </a:r>
+          </a:p>
+        </p:txBody>
+      </p:sp>
+      <p:sp>
+        <p:nvSpPr>
+          <p:cNvPr id="9" name="TextBox 8"/>
+          <p:cNvSpPr txBox="1"/>
+          <p:nvPr/>
+        </p:nvSpPr>
+        <p:spPr>
+          <a:xfrm>
+            <a:off x="6400800" y="4754880"/>
+            <a:ext cx="2286000" cy="274320"/>
+          </a:xfrm>
+          <a:prstGeom prst="rect">
+            <a:avLst/>
+          </a:prstGeom>
+          <a:noFill/>
+        </p:spPr>
+        <p:txBody>
+          <a:bodyPr wrap="square" anchor="t" lIns="0" rIns="0" tIns="0" bIns="0">
+            <a:spAutoFit/>
+          </a:bodyPr>
+          <a:lstStyle/>
+          <a:p>
+            <a:pPr algn="r"/>
+            <a:r>
+              <a:rPr sz="900" b="0" i="0">
+                <a:solidFill>
+                  <a:srgbClr val="7A8A95"/>
+                </a:solidFill>
+                <a:latin typeface="Calibri"/>
+              </a:rPr>
+              <a:t>Mum Life Balance</a:t>
             </a:r>
           </a:p>
         </p:txBody>
@@ -5574,20 +6325,343 @@
       <p:grpSpPr/>
       <p:sp>
         <p:nvSpPr>
-          <p:cNvPr id="2" name="Rectangle 1"/>
+          <p:cNvPr id="2" name="TextBox 1"/>
+          <p:cNvSpPr txBox="1"/>
+          <p:nvPr/>
+        </p:nvSpPr>
+        <p:spPr>
+          <a:xfrm>
+            <a:off x="548640" y="457200"/>
+            <a:ext cx="8046720" cy="914400"/>
+          </a:xfrm>
+          <a:prstGeom prst="rect">
+            <a:avLst/>
+          </a:prstGeom>
+          <a:noFill/>
+        </p:spPr>
+        <p:txBody>
+          <a:bodyPr wrap="square" anchor="t" lIns="0" rIns="0" tIns="0" bIns="0">
+            <a:spAutoFit/>
+          </a:bodyPr>
+          <a:lstStyle/>
+          <a:p>
+            <a:r>
+              <a:rPr sz="3000" b="1" i="0">
+                <a:solidFill>
+                  <a:srgbClr val="1A3A4A"/>
+                </a:solidFill>
+                <a:latin typeface="Georgia"/>
+              </a:rPr>
+              <a:t>Dein Monats-Rhythmus</a:t>
+            </a:r>
+          </a:p>
+        </p:txBody>
+      </p:sp>
+      <p:sp>
+        <p:nvSpPr>
+          <p:cNvPr id="3" name="TextBox 2"/>
+          <p:cNvSpPr txBox="1"/>
+          <p:nvPr/>
+        </p:nvSpPr>
+        <p:spPr>
+          <a:xfrm>
+            <a:off x="548640" y="1234440"/>
+            <a:ext cx="8046720" cy="457200"/>
+          </a:xfrm>
+          <a:prstGeom prst="rect">
+            <a:avLst/>
+          </a:prstGeom>
+          <a:noFill/>
+        </p:spPr>
+        <p:txBody>
+          <a:bodyPr wrap="square" anchor="t" lIns="0" rIns="0" tIns="0" bIns="0">
+            <a:spAutoFit/>
+          </a:bodyPr>
+          <a:lstStyle/>
+          <a:p>
+            <a:r>
+              <a:rPr sz="1300" b="0" i="0">
+                <a:solidFill>
+                  <a:srgbClr val="7A8A95"/>
+                </a:solidFill>
+                <a:latin typeface="Calibri"/>
+              </a:rPr>
+              <a:t>Jeden Monat dieselben drei Stufen:</a:t>
+            </a:r>
+          </a:p>
+        </p:txBody>
+      </p:sp>
+      <p:sp>
+        <p:nvSpPr>
+          <p:cNvPr id="4" name="TextBox 3"/>
+          <p:cNvSpPr txBox="1"/>
+          <p:nvPr/>
+        </p:nvSpPr>
+        <p:spPr>
+          <a:xfrm>
+            <a:off x="548640" y="1783080"/>
+            <a:ext cx="8046720" cy="2788920"/>
+          </a:xfrm>
+          <a:prstGeom prst="rect">
+            <a:avLst/>
+          </a:prstGeom>
+          <a:noFill/>
+        </p:spPr>
+        <p:txBody>
+          <a:bodyPr wrap="square" anchor="t" lIns="0" rIns="0" tIns="0" bIns="0">
+            <a:spAutoFit/>
+          </a:bodyPr>
+          <a:lstStyle/>
+          <a:p>
+            <a:pPr>
+              <a:spcBef>
+                <a:spcPts val="0"/>
+              </a:spcBef>
+              <a:spcAft>
+                <a:spcPts val="900"/>
+              </a:spcAft>
+            </a:pPr>
+            <a:r>
+              <a:rPr sz="1600" b="1" i="0">
+                <a:solidFill>
+                  <a:srgbClr val="DC822E"/>
+                </a:solidFill>
+                <a:latin typeface="Calibri"/>
+              </a:rPr>
+              <a:t>▪  </a:t>
+            </a:r>
+            <a:r>
+              <a:rPr sz="1600" b="0" i="0">
+                <a:solidFill>
+                  <a:srgbClr val="2C3E50"/>
+                </a:solidFill>
+                <a:latin typeface="Calibri"/>
+              </a:rPr>
+              <a:t>🎁  1 Gratis-Produkt</a:t>
+            </a:r>
+          </a:p>
+          <a:p>
+            <a:pPr>
+              <a:spcBef>
+                <a:spcPts val="0"/>
+              </a:spcBef>
+              <a:spcAft>
+                <a:spcPts val="900"/>
+              </a:spcAft>
+            </a:pPr>
+            <a:r>
+              <a:rPr sz="1600" b="1" i="0">
+                <a:solidFill>
+                  <a:srgbClr val="DC822E"/>
+                </a:solidFill>
+                <a:latin typeface="Calibri"/>
+              </a:rPr>
+              <a:t>▪  </a:t>
+            </a:r>
+            <a:r>
+              <a:rPr sz="1600" b="0" i="0">
+                <a:solidFill>
+                  <a:srgbClr val="2C3E50"/>
+                </a:solidFill>
+                <a:latin typeface="Calibri"/>
+              </a:rPr>
+              <a:t>💶  1 Mini-Produkt</a:t>
+            </a:r>
+          </a:p>
+          <a:p>
+            <a:pPr>
+              <a:spcBef>
+                <a:spcPts val="0"/>
+              </a:spcBef>
+              <a:spcAft>
+                <a:spcPts val="900"/>
+              </a:spcAft>
+            </a:pPr>
+            <a:r>
+              <a:rPr sz="1600" b="1" i="0">
+                <a:solidFill>
+                  <a:srgbClr val="DC822E"/>
+                </a:solidFill>
+                <a:latin typeface="Calibri"/>
+              </a:rPr>
+              <a:t>▪  </a:t>
+            </a:r>
+            <a:r>
+              <a:rPr sz="1600" b="0" i="0">
+                <a:solidFill>
+                  <a:srgbClr val="2C3E50"/>
+                </a:solidFill>
+                <a:latin typeface="Calibri"/>
+              </a:rPr>
+              <a:t>💎  1 grosses Produkt</a:t>
+            </a:r>
+          </a:p>
+          <a:p>
+            <a:pPr>
+              <a:spcBef>
+                <a:spcPts val="0"/>
+              </a:spcBef>
+              <a:spcAft>
+                <a:spcPts val="800"/>
+              </a:spcAft>
+            </a:pPr>
+            <a:r>
+              <a:rPr sz="1400" b="0" i="1">
+                <a:solidFill>
+                  <a:srgbClr val="7A8A95"/>
+                </a:solidFill>
+                <a:latin typeface="Calibri"/>
+              </a:rPr>
+              <a:t>Ein klarer Takt, an dem sich dein ganzer Content ausrichtet.</a:t>
+            </a:r>
+          </a:p>
+        </p:txBody>
+      </p:sp>
+      <p:sp>
+        <p:nvSpPr>
+          <p:cNvPr id="5" name="TextBox 4"/>
+          <p:cNvSpPr txBox="1"/>
+          <p:nvPr/>
+        </p:nvSpPr>
+        <p:spPr>
+          <a:xfrm>
+            <a:off x="457200" y="4754880"/>
+            <a:ext cx="5486400" cy="274320"/>
+          </a:xfrm>
+          <a:prstGeom prst="rect">
+            <a:avLst/>
+          </a:prstGeom>
+          <a:noFill/>
+        </p:spPr>
+        <p:txBody>
+          <a:bodyPr wrap="square" anchor="t" lIns="0" rIns="0" tIns="0" bIns="0">
+            <a:spAutoFit/>
+          </a:bodyPr>
+          <a:lstStyle/>
+          <a:p>
+            <a:r>
+              <a:rPr sz="900" b="0" i="0">
+                <a:solidFill>
+                  <a:srgbClr val="7A8A95"/>
+                </a:solidFill>
+                <a:latin typeface="Calibri"/>
+              </a:rPr>
+              <a:t>Mama-CEO · Säule 3 · Lektion 3.3</a:t>
+            </a:r>
+          </a:p>
+        </p:txBody>
+      </p:sp>
+      <p:sp>
+        <p:nvSpPr>
+          <p:cNvPr id="6" name="TextBox 5"/>
+          <p:cNvSpPr txBox="1"/>
+          <p:nvPr/>
+        </p:nvSpPr>
+        <p:spPr>
+          <a:xfrm>
+            <a:off x="6400800" y="4754880"/>
+            <a:ext cx="2286000" cy="274320"/>
+          </a:xfrm>
+          <a:prstGeom prst="rect">
+            <a:avLst/>
+          </a:prstGeom>
+          <a:noFill/>
+        </p:spPr>
+        <p:txBody>
+          <a:bodyPr wrap="square" anchor="t" lIns="0" rIns="0" tIns="0" bIns="0">
+            <a:spAutoFit/>
+          </a:bodyPr>
+          <a:lstStyle/>
+          <a:p>
+            <a:pPr algn="r"/>
+            <a:r>
+              <a:rPr sz="900" b="0" i="0">
+                <a:solidFill>
+                  <a:srgbClr val="7A8A95"/>
+                </a:solidFill>
+                <a:latin typeface="Calibri"/>
+              </a:rPr>
+              <a:t>Mum Life Balance</a:t>
+            </a:r>
+          </a:p>
+        </p:txBody>
+      </p:sp>
+    </p:spTree>
+  </p:cSld>
+  <p:clrMapOvr>
+    <a:masterClrMapping/>
+  </p:clrMapOvr>
+</p:sld>
+</file>
+
+<file path=ppt/slides/slide6.xml><?xml version="1.0" encoding="utf-8"?>
+<p:sld xmlns:a="http://schemas.openxmlformats.org/drawingml/2006/main" xmlns:p="http://schemas.openxmlformats.org/presentationml/2006/main" xmlns:r="http://schemas.openxmlformats.org/officeDocument/2006/relationships">
+  <p:cSld>
+    <p:bg>
+      <p:bgPr>
+        <a:solidFill>
+          <a:srgbClr val="12828C"/>
+        </a:solidFill>
+        <a:effectLst/>
+      </p:bgPr>
+    </p:bg>
+    <p:spTree>
+      <p:nvGrpSpPr>
+        <p:cNvPr id="1" name=""/>
+        <p:cNvGrpSpPr/>
+        <p:nvPr/>
+      </p:nvGrpSpPr>
+      <p:grpSpPr/>
+      <p:sp>
+        <p:nvSpPr>
+          <p:cNvPr id="2" name="TextBox 1"/>
+          <p:cNvSpPr txBox="1"/>
+          <p:nvPr/>
+        </p:nvSpPr>
+        <p:spPr>
+          <a:xfrm>
+            <a:off x="548640" y="1097280"/>
+            <a:ext cx="8046720" cy="365760"/>
+          </a:xfrm>
+          <a:prstGeom prst="rect">
+            <a:avLst/>
+          </a:prstGeom>
+          <a:noFill/>
+        </p:spPr>
+        <p:txBody>
+          <a:bodyPr wrap="square" anchor="t" lIns="0" rIns="0" tIns="0" bIns="0">
+            <a:spAutoFit/>
+          </a:bodyPr>
+          <a:lstStyle/>
+          <a:p>
+            <a:r>
+              <a:rPr sz="1100" b="1" i="0">
+                <a:solidFill>
+                  <a:srgbClr val="DC822E"/>
+                </a:solidFill>
+                <a:latin typeface="Calibri"/>
+              </a:rPr>
+              <a:t>DER WICHTIGSTE SATZ</a:t>
+            </a:r>
+          </a:p>
+        </p:txBody>
+      </p:sp>
+      <p:sp>
+        <p:nvSpPr>
+          <p:cNvPr id="3" name="Rectangle 2"/>
           <p:cNvSpPr/>
           <p:nvPr/>
         </p:nvSpPr>
         <p:spPr>
           <a:xfrm>
-            <a:off x="548640" y="502920"/>
-            <a:ext cx="201168" cy="201168"/>
+            <a:off x="548640" y="1554480"/>
+            <a:ext cx="548640" cy="45720"/>
           </a:xfrm>
           <a:prstGeom prst="rect">
             <a:avLst/>
           </a:prstGeom>
           <a:solidFill>
-            <a:srgbClr val="1F6F6B"/>
+            <a:srgbClr val="DC822E"/>
           </a:solidFill>
           <a:ln>
             <a:noFill/>
@@ -5618,14 +6692,14 @@
       </p:sp>
       <p:sp>
         <p:nvSpPr>
-          <p:cNvPr id="3" name="TextBox 2"/>
+          <p:cNvPr id="4" name="TextBox 3"/>
           <p:cNvSpPr txBox="1"/>
           <p:nvPr/>
         </p:nvSpPr>
         <p:spPr>
           <a:xfrm>
-            <a:off x="868680" y="457200"/>
-            <a:ext cx="10424160" cy="1005840"/>
+            <a:off x="548640" y="1920240"/>
+            <a:ext cx="8046720" cy="2194560"/>
           </a:xfrm>
           <a:prstGeom prst="rect">
             <a:avLst/>
@@ -5638,36 +6712,28 @@
           </a:bodyPr>
           <a:lstStyle/>
           <a:p>
-            <a:pPr algn="l">
-              <a:spcBef>
-                <a:spcPts val="0"/>
-              </a:spcBef>
-              <a:spcAft>
-                <a:spcPts val="1000"/>
-              </a:spcAft>
-            </a:pPr>
-            <a:r>
-              <a:rPr sz="3200" b="1" i="0">
-                <a:solidFill>
-                  <a:srgbClr val="1F6F6B"/>
+            <a:r>
+              <a:rPr sz="2800" b="1" i="0">
+                <a:solidFill>
+                  <a:srgbClr val="F1ECDD"/>
                 </a:solidFill>
                 <a:latin typeface="Georgia"/>
               </a:rPr>
-              <a:t>Dein Monats-Rhythmus</a:t>
-            </a:r>
-          </a:p>
-        </p:txBody>
-      </p:sp>
-      <p:sp>
-        <p:nvSpPr>
-          <p:cNvPr id="4" name="TextBox 3"/>
+              <a:t>Das Produkt ist das Werkzeug. Die Transformation ist das Ziel.</a:t>
+            </a:r>
+          </a:p>
+        </p:txBody>
+      </p:sp>
+      <p:sp>
+        <p:nvSpPr>
+          <p:cNvPr id="5" name="TextBox 4"/>
           <p:cNvSpPr txBox="1"/>
           <p:nvPr/>
         </p:nvSpPr>
         <p:spPr>
           <a:xfrm>
-            <a:off x="868680" y="1783080"/>
-            <a:ext cx="10424160" cy="4572000"/>
+            <a:off x="548640" y="3703320"/>
+            <a:ext cx="8046720" cy="731520"/>
           </a:xfrm>
           <a:prstGeom prst="rect">
             <a:avLst/>
@@ -5680,182 +6746,28 @@
           </a:bodyPr>
           <a:lstStyle/>
           <a:p>
-            <a:pPr algn="l">
-              <a:spcBef>
-                <a:spcPts val="0"/>
-              </a:spcBef>
-              <a:spcAft>
-                <a:spcPts val="1400"/>
-              </a:spcAft>
-            </a:pPr>
-            <a:r>
-              <a:rPr sz="2100" b="0" i="0">
-                <a:solidFill>
-                  <a:srgbClr val="2A2A2A"/>
+            <a:r>
+              <a:rPr sz="1500" b="0" i="1">
+                <a:solidFill>
+                  <a:srgbClr val="F1ECDD"/>
                 </a:solidFill>
                 <a:latin typeface="Calibri"/>
               </a:rPr>
-              <a:t>Jeden Monat dieselben drei Stufen:</a:t>
-            </a:r>
-          </a:p>
-          <a:p>
-            <a:pPr algn="l">
-              <a:spcBef>
-                <a:spcPts val="0"/>
-              </a:spcBef>
-              <a:spcAft>
-                <a:spcPts val="1400"/>
-              </a:spcAft>
-            </a:pPr>
-            <a:r>
-              <a:rPr sz="2100" b="0" i="0">
-                <a:solidFill>
-                  <a:srgbClr val="2A2A2A"/>
-                </a:solidFill>
-                <a:latin typeface="Calibri"/>
-              </a:rPr>
-              <a:t>🎁  1 Gratis-Produkt</a:t>
-            </a:r>
-          </a:p>
-          <a:p>
-            <a:pPr algn="l">
-              <a:spcBef>
-                <a:spcPts val="0"/>
-              </a:spcBef>
-              <a:spcAft>
-                <a:spcPts val="1400"/>
-              </a:spcAft>
-            </a:pPr>
-            <a:r>
-              <a:rPr sz="2100" b="0" i="0">
-                <a:solidFill>
-                  <a:srgbClr val="2A2A2A"/>
-                </a:solidFill>
-                <a:latin typeface="Calibri"/>
-              </a:rPr>
-              <a:t>💶  1 Mini-Produkt</a:t>
-            </a:r>
-          </a:p>
-          <a:p>
-            <a:pPr algn="l">
-              <a:spcBef>
-                <a:spcPts val="0"/>
-              </a:spcBef>
-              <a:spcAft>
-                <a:spcPts val="1400"/>
-              </a:spcAft>
-            </a:pPr>
-            <a:r>
-              <a:rPr sz="2100" b="0" i="0">
-                <a:solidFill>
-                  <a:srgbClr val="2A2A2A"/>
-                </a:solidFill>
-                <a:latin typeface="Calibri"/>
-              </a:rPr>
-              <a:t>💎  1 grosses Produkt</a:t>
-            </a:r>
-          </a:p>
-          <a:p>
-            <a:pPr algn="l">
-              <a:spcBef>
-                <a:spcPts val="0"/>
-              </a:spcBef>
-              <a:spcAft>
-                <a:spcPts val="1400"/>
-              </a:spcAft>
-            </a:pPr>
-            <a:r>
-              <a:rPr sz="2000" b="0" i="1">
-                <a:solidFill>
-                  <a:srgbClr val="6E6E6E"/>
-                </a:solidFill>
-                <a:latin typeface="Calibri"/>
-              </a:rPr>
-              <a:t>Ein klarer Takt, an dem sich dein ganzer Content ausrichtet.</a:t>
-            </a:r>
-          </a:p>
-        </p:txBody>
-      </p:sp>
-    </p:spTree>
-  </p:cSld>
-  <p:clrMapOvr>
-    <a:masterClrMapping/>
-  </p:clrMapOvr>
-</p:sld>
-</file>
-
-<file path=ppt/slides/slide6.xml><?xml version="1.0" encoding="utf-8"?>
-<p:sld xmlns:a="http://schemas.openxmlformats.org/drawingml/2006/main" xmlns:p="http://schemas.openxmlformats.org/presentationml/2006/main" xmlns:r="http://schemas.openxmlformats.org/officeDocument/2006/relationships">
-  <p:cSld>
-    <p:bg>
-      <p:bgPr>
-        <a:solidFill>
-          <a:srgbClr val="FFFFFF"/>
-        </a:solidFill>
-        <a:effectLst/>
-      </p:bgPr>
-    </p:bg>
-    <p:spTree>
-      <p:nvGrpSpPr>
-        <p:cNvPr id="1" name=""/>
-        <p:cNvGrpSpPr/>
-        <p:nvPr/>
-      </p:nvGrpSpPr>
-      <p:grpSpPr/>
-      <p:sp>
-        <p:nvSpPr>
-          <p:cNvPr id="2" name="Rectangle 1"/>
-          <p:cNvSpPr/>
-          <p:nvPr/>
-        </p:nvSpPr>
-        <p:spPr>
-          <a:xfrm>
-            <a:off x="548640" y="502920"/>
-            <a:ext cx="201168" cy="201168"/>
-          </a:xfrm>
-          <a:prstGeom prst="rect">
-            <a:avLst/>
-          </a:prstGeom>
-          <a:solidFill>
-            <a:srgbClr val="1F6F6B"/>
-          </a:solidFill>
-          <a:ln>
-            <a:noFill/>
-          </a:ln>
-          <a:effectLst/>
-        </p:spPr>
-        <p:style>
-          <a:lnRef idx="1">
-            <a:schemeClr val="accent1"/>
-          </a:lnRef>
-          <a:fillRef idx="3">
-            <a:schemeClr val="accent1"/>
-          </a:fillRef>
-          <a:effectRef idx="2">
-            <a:schemeClr val="accent1"/>
-          </a:effectRef>
-          <a:fontRef idx="minor">
-            <a:schemeClr val="lt1"/>
-          </a:fontRef>
-        </p:style>
-        <p:txBody>
-          <a:bodyPr rtlCol="0" anchor="ctr"/>
-          <a:lstStyle/>
-          <a:p>
-            <a:pPr algn="ctr"/>
-          </a:p>
-        </p:txBody>
-      </p:sp>
-      <p:sp>
-        <p:nvSpPr>
-          <p:cNvPr id="3" name="TextBox 2"/>
+              <a:t>Niemand will das Produkt — alle wollen das Ergebnis dahinter.</a:t>
+            </a:r>
+          </a:p>
+        </p:txBody>
+      </p:sp>
+      <p:sp>
+        <p:nvSpPr>
+          <p:cNvPr id="6" name="TextBox 5"/>
           <p:cNvSpPr txBox="1"/>
           <p:nvPr/>
         </p:nvSpPr>
         <p:spPr>
           <a:xfrm>
-            <a:off x="868680" y="457200"/>
-            <a:ext cx="10424160" cy="1005840"/>
+            <a:off x="457200" y="4754880"/>
+            <a:ext cx="5486400" cy="274320"/>
           </a:xfrm>
           <a:prstGeom prst="rect">
             <a:avLst/>
@@ -5868,36 +6780,28 @@
           </a:bodyPr>
           <a:lstStyle/>
           <a:p>
-            <a:pPr algn="l">
-              <a:spcBef>
-                <a:spcPts val="0"/>
-              </a:spcBef>
-              <a:spcAft>
-                <a:spcPts val="1000"/>
-              </a:spcAft>
-            </a:pPr>
-            <a:r>
-              <a:rPr sz="3200" b="1" i="0">
-                <a:solidFill>
-                  <a:srgbClr val="1F6F6B"/>
-                </a:solidFill>
-                <a:latin typeface="Georgia"/>
-              </a:rPr>
-              <a:t>Nie das Produkt — immer die Transformation</a:t>
-            </a:r>
-          </a:p>
-        </p:txBody>
-      </p:sp>
-      <p:sp>
-        <p:nvSpPr>
-          <p:cNvPr id="4" name="TextBox 3"/>
+            <a:r>
+              <a:rPr sz="900" b="0" i="0">
+                <a:solidFill>
+                  <a:srgbClr val="F1ECDD"/>
+                </a:solidFill>
+                <a:latin typeface="Calibri"/>
+              </a:rPr>
+              <a:t>Mama-CEO · Säule 3 · Lektion 3.3</a:t>
+            </a:r>
+          </a:p>
+        </p:txBody>
+      </p:sp>
+      <p:sp>
+        <p:nvSpPr>
+          <p:cNvPr id="7" name="TextBox 6"/>
           <p:cNvSpPr txBox="1"/>
           <p:nvPr/>
         </p:nvSpPr>
         <p:spPr>
           <a:xfrm>
-            <a:off x="868680" y="1783080"/>
-            <a:ext cx="10424160" cy="4572000"/>
+            <a:off x="6400800" y="4754880"/>
+            <a:ext cx="2286000" cy="274320"/>
           </a:xfrm>
           <a:prstGeom prst="rect">
             <a:avLst/>
@@ -5910,60 +6814,15 @@
           </a:bodyPr>
           <a:lstStyle/>
           <a:p>
-            <a:pPr algn="l">
-              <a:spcBef>
-                <a:spcPts val="0"/>
-              </a:spcBef>
-              <a:spcAft>
-                <a:spcPts val="1400"/>
-              </a:spcAft>
-            </a:pPr>
-            <a:r>
-              <a:rPr sz="2600" b="1" i="0">
-                <a:solidFill>
-                  <a:srgbClr val="2A2A2A"/>
-                </a:solidFill>
-                <a:latin typeface="Georgia"/>
-              </a:rPr>
-              <a:t>Das Produkt ist das Werkzeug.</a:t>
-            </a:r>
-          </a:p>
-          <a:p>
-            <a:pPr algn="l">
-              <a:spcBef>
-                <a:spcPts val="0"/>
-              </a:spcBef>
-              <a:spcAft>
-                <a:spcPts val="1400"/>
-              </a:spcAft>
-            </a:pPr>
-            <a:r>
-              <a:rPr sz="2600" b="1" i="0">
-                <a:solidFill>
-                  <a:srgbClr val="2A2A2A"/>
-                </a:solidFill>
-                <a:latin typeface="Georgia"/>
-              </a:rPr>
-              <a:t>Die Transformation ist das Ziel.</a:t>
-            </a:r>
-          </a:p>
-          <a:p>
-            <a:pPr algn="l">
-              <a:spcBef>
-                <a:spcPts val="0"/>
-              </a:spcBef>
-              <a:spcAft>
-                <a:spcPts val="1400"/>
-              </a:spcAft>
-            </a:pPr>
-            <a:r>
-              <a:rPr sz="2000" b="0" i="1">
-                <a:solidFill>
-                  <a:srgbClr val="6E6E6E"/>
+            <a:pPr algn="r"/>
+            <a:r>
+              <a:rPr sz="900" b="0" i="0">
+                <a:solidFill>
+                  <a:srgbClr val="F1ECDD"/>
                 </a:solidFill>
                 <a:latin typeface="Calibri"/>
               </a:rPr>
-              <a:t>Niemand will das Produkt — alle wollen das Ergebnis dahinter.</a:t>
+              <a:t>Mum Life Balance</a:t>
             </a:r>
           </a:p>
         </p:txBody>
@@ -5996,58 +6855,14 @@
       <p:grpSpPr/>
       <p:sp>
         <p:nvSpPr>
-          <p:cNvPr id="2" name="Rectangle 1"/>
-          <p:cNvSpPr/>
-          <p:nvPr/>
-        </p:nvSpPr>
-        <p:spPr>
-          <a:xfrm>
-            <a:off x="548640" y="502920"/>
-            <a:ext cx="201168" cy="201168"/>
-          </a:xfrm>
-          <a:prstGeom prst="rect">
-            <a:avLst/>
-          </a:prstGeom>
-          <a:solidFill>
-            <a:srgbClr val="1F6F6B"/>
-          </a:solidFill>
-          <a:ln>
-            <a:noFill/>
-          </a:ln>
-          <a:effectLst/>
-        </p:spPr>
-        <p:style>
-          <a:lnRef idx="1">
-            <a:schemeClr val="accent1"/>
-          </a:lnRef>
-          <a:fillRef idx="3">
-            <a:schemeClr val="accent1"/>
-          </a:fillRef>
-          <a:effectRef idx="2">
-            <a:schemeClr val="accent1"/>
-          </a:effectRef>
-          <a:fontRef idx="minor">
-            <a:schemeClr val="lt1"/>
-          </a:fontRef>
-        </p:style>
-        <p:txBody>
-          <a:bodyPr rtlCol="0" anchor="ctr"/>
-          <a:lstStyle/>
-          <a:p>
-            <a:pPr algn="ctr"/>
-          </a:p>
-        </p:txBody>
-      </p:sp>
-      <p:sp>
-        <p:nvSpPr>
-          <p:cNvPr id="3" name="TextBox 2"/>
+          <p:cNvPr id="2" name="TextBox 1"/>
           <p:cNvSpPr txBox="1"/>
           <p:nvPr/>
         </p:nvSpPr>
         <p:spPr>
           <a:xfrm>
-            <a:off x="868680" y="457200"/>
-            <a:ext cx="10424160" cy="1005840"/>
+            <a:off x="548640" y="457200"/>
+            <a:ext cx="8046720" cy="914400"/>
           </a:xfrm>
           <a:prstGeom prst="rect">
             <a:avLst/>
@@ -6060,22 +6875,113 @@
           </a:bodyPr>
           <a:lstStyle/>
           <a:p>
-            <a:pPr algn="l">
+            <a:r>
+              <a:rPr sz="3000" b="1" i="0">
+                <a:solidFill>
+                  <a:srgbClr val="1A3A4A"/>
+                </a:solidFill>
+                <a:latin typeface="Georgia"/>
+              </a:rPr>
+              <a:t>Beispiel: Abnehmshake</a:t>
+            </a:r>
+          </a:p>
+        </p:txBody>
+      </p:sp>
+      <p:sp>
+        <p:nvSpPr>
+          <p:cNvPr id="3" name="TextBox 2"/>
+          <p:cNvSpPr txBox="1"/>
+          <p:nvPr/>
+        </p:nvSpPr>
+        <p:spPr>
+          <a:xfrm>
+            <a:off x="548640" y="1417320"/>
+            <a:ext cx="8046720" cy="3154680"/>
+          </a:xfrm>
+          <a:prstGeom prst="rect">
+            <a:avLst/>
+          </a:prstGeom>
+          <a:noFill/>
+        </p:spPr>
+        <p:txBody>
+          <a:bodyPr wrap="square" anchor="t" lIns="0" rIns="0" tIns="0" bIns="0">
+            <a:spAutoFit/>
+          </a:bodyPr>
+          <a:lstStyle/>
+          <a:p>
+            <a:pPr>
               <a:spcBef>
                 <a:spcPts val="0"/>
               </a:spcBef>
               <a:spcAft>
-                <a:spcPts val="1000"/>
+                <a:spcPts val="900"/>
               </a:spcAft>
             </a:pPr>
             <a:r>
-              <a:rPr sz="3200" b="1" i="0">
-                <a:solidFill>
-                  <a:srgbClr val="1F6F6B"/>
-                </a:solidFill>
-                <a:latin typeface="Georgia"/>
-              </a:rPr>
-              <a:t>Beispiel: Abnehmshake</a:t>
+              <a:rPr sz="1600" b="0" i="0">
+                <a:solidFill>
+                  <a:srgbClr val="2C3E50"/>
+                </a:solidFill>
+                <a:latin typeface="Calibri"/>
+              </a:rPr>
+              <a:t>Produkt: der Shake</a:t>
+            </a:r>
+          </a:p>
+          <a:p>
+            <a:pPr>
+              <a:spcBef>
+                <a:spcPts val="0"/>
+              </a:spcBef>
+              <a:spcAft>
+                <a:spcPts val="900"/>
+              </a:spcAft>
+            </a:pPr>
+            <a:r>
+              <a:rPr sz="1600" b="0" i="0">
+                <a:solidFill>
+                  <a:srgbClr val="2C3E50"/>
+                </a:solidFill>
+                <a:latin typeface="Calibri"/>
+              </a:rPr>
+              <a:t>Ziel: sich endlich wieder geil im Bikini fühlen</a:t>
+            </a:r>
+          </a:p>
+          <a:p>
+            <a:pPr>
+              <a:spcBef>
+                <a:spcPts val="0"/>
+              </a:spcBef>
+              <a:spcAft>
+                <a:spcPts val="900"/>
+              </a:spcAft>
+            </a:pPr>
+            <a:r>
+              <a:rPr sz="1600" b="0" i="0">
+                <a:solidFill>
+                  <a:srgbClr val="2C3E50"/>
+                </a:solidFill>
+                <a:latin typeface="Calibri"/>
+              </a:rPr>
+              <a:t>Überthemen: Ernährung · Bewegung · Mindset</a:t>
+            </a:r>
+          </a:p>
+          <a:p>
+            <a:pPr>
+              <a:spcBef>
+                <a:spcPts val="0"/>
+              </a:spcBef>
+              <a:spcAft>
+                <a:spcPts val="800"/>
+              </a:spcAft>
+            </a:pPr>
+            <a:r>
+              <a:rPr sz="1400" b="0" i="1">
+                <a:solidFill>
+                  <a:srgbClr val="7A8A95"/>
+                </a:solidFill>
+                <a:latin typeface="Calibri"/>
+              </a:rPr>
+              <a:t>→ darüber redest du in den Wochen, nicht über den Shake.</a:t>
             </a:r>
           </a:p>
         </p:txBody>
@@ -6088,8 +6994,8 @@
         </p:nvSpPr>
         <p:spPr>
           <a:xfrm>
-            <a:off x="868680" y="1783080"/>
-            <a:ext cx="10424160" cy="4572000"/>
+            <a:off x="457200" y="4754880"/>
+            <a:ext cx="5486400" cy="274320"/>
           </a:xfrm>
           <a:prstGeom prst="rect">
             <a:avLst/>
@@ -6102,79 +7008,49 @@
           </a:bodyPr>
           <a:lstStyle/>
           <a:p>
-            <a:pPr algn="l">
-              <a:spcBef>
-                <a:spcPts val="0"/>
-              </a:spcBef>
-              <a:spcAft>
-                <a:spcPts val="1400"/>
-              </a:spcAft>
-            </a:pPr>
-            <a:r>
-              <a:rPr sz="2100" b="0" i="0">
-                <a:solidFill>
-                  <a:srgbClr val="2A2A2A"/>
+            <a:r>
+              <a:rPr sz="900" b="0" i="0">
+                <a:solidFill>
+                  <a:srgbClr val="7A8A95"/>
                 </a:solidFill>
                 <a:latin typeface="Calibri"/>
               </a:rPr>
-              <a:t>Produkt: der Shake</a:t>
-            </a:r>
-          </a:p>
-          <a:p>
-            <a:pPr algn="l">
-              <a:spcBef>
-                <a:spcPts val="0"/>
-              </a:spcBef>
-              <a:spcAft>
-                <a:spcPts val="1400"/>
-              </a:spcAft>
-            </a:pPr>
-            <a:r>
-              <a:rPr sz="2100" b="0" i="0">
-                <a:solidFill>
-                  <a:srgbClr val="2A2A2A"/>
+              <a:t>Mama-CEO · Säule 3 · Lektion 3.3</a:t>
+            </a:r>
+          </a:p>
+        </p:txBody>
+      </p:sp>
+      <p:sp>
+        <p:nvSpPr>
+          <p:cNvPr id="5" name="TextBox 4"/>
+          <p:cNvSpPr txBox="1"/>
+          <p:nvPr/>
+        </p:nvSpPr>
+        <p:spPr>
+          <a:xfrm>
+            <a:off x="6400800" y="4754880"/>
+            <a:ext cx="2286000" cy="274320"/>
+          </a:xfrm>
+          <a:prstGeom prst="rect">
+            <a:avLst/>
+          </a:prstGeom>
+          <a:noFill/>
+        </p:spPr>
+        <p:txBody>
+          <a:bodyPr wrap="square" anchor="t" lIns="0" rIns="0" tIns="0" bIns="0">
+            <a:spAutoFit/>
+          </a:bodyPr>
+          <a:lstStyle/>
+          <a:p>
+            <a:pPr algn="r"/>
+            <a:r>
+              <a:rPr sz="900" b="0" i="0">
+                <a:solidFill>
+                  <a:srgbClr val="7A8A95"/>
                 </a:solidFill>
                 <a:latin typeface="Calibri"/>
               </a:rPr>
-              <a:t>Ziel: sich endlich wieder geil im Bikini fühlen</a:t>
-            </a:r>
-          </a:p>
-          <a:p>
-            <a:pPr algn="l">
-              <a:spcBef>
-                <a:spcPts val="0"/>
-              </a:spcBef>
-              <a:spcAft>
-                <a:spcPts val="1400"/>
-              </a:spcAft>
-            </a:pPr>
-            <a:r>
-              <a:rPr sz="2100" b="0" i="0">
-                <a:solidFill>
-                  <a:srgbClr val="2A2A2A"/>
-                </a:solidFill>
-                <a:latin typeface="Calibri"/>
-              </a:rPr>
-              <a:t>Überthemen: Ernährung · Bewegung · Mindset</a:t>
-            </a:r>
-          </a:p>
-          <a:p>
-            <a:pPr algn="l">
-              <a:spcBef>
-                <a:spcPts val="0"/>
-              </a:spcBef>
-              <a:spcAft>
-                <a:spcPts val="1400"/>
-              </a:spcAft>
-            </a:pPr>
-            <a:r>
-              <a:rPr sz="2000" b="0" i="1">
-                <a:solidFill>
-                  <a:srgbClr val="6E6E6E"/>
-                </a:solidFill>
-                <a:latin typeface="Calibri"/>
-              </a:rPr>
-              <a:t>→ darüber redest du in den Wochen, nicht über den Shake.</a:t>
+              <a:t>Mum Life Balance</a:t>
             </a:r>
           </a:p>
         </p:txBody>
@@ -6207,58 +7083,14 @@
       <p:grpSpPr/>
       <p:sp>
         <p:nvSpPr>
-          <p:cNvPr id="2" name="Rectangle 1"/>
-          <p:cNvSpPr/>
-          <p:nvPr/>
-        </p:nvSpPr>
-        <p:spPr>
-          <a:xfrm>
-            <a:off x="548640" y="502920"/>
-            <a:ext cx="201168" cy="201168"/>
-          </a:xfrm>
-          <a:prstGeom prst="rect">
-            <a:avLst/>
-          </a:prstGeom>
-          <a:solidFill>
-            <a:srgbClr val="1F6F6B"/>
-          </a:solidFill>
-          <a:ln>
-            <a:noFill/>
-          </a:ln>
-          <a:effectLst/>
-        </p:spPr>
-        <p:style>
-          <a:lnRef idx="1">
-            <a:schemeClr val="accent1"/>
-          </a:lnRef>
-          <a:fillRef idx="3">
-            <a:schemeClr val="accent1"/>
-          </a:fillRef>
-          <a:effectRef idx="2">
-            <a:schemeClr val="accent1"/>
-          </a:effectRef>
-          <a:fontRef idx="minor">
-            <a:schemeClr val="lt1"/>
-          </a:fontRef>
-        </p:style>
-        <p:txBody>
-          <a:bodyPr rtlCol="0" anchor="ctr"/>
-          <a:lstStyle/>
-          <a:p>
-            <a:pPr algn="ctr"/>
-          </a:p>
-        </p:txBody>
-      </p:sp>
-      <p:sp>
-        <p:nvSpPr>
-          <p:cNvPr id="3" name="TextBox 2"/>
+          <p:cNvPr id="2" name="TextBox 1"/>
           <p:cNvSpPr txBox="1"/>
           <p:nvPr/>
         </p:nvSpPr>
         <p:spPr>
           <a:xfrm>
-            <a:off x="868680" y="457200"/>
-            <a:ext cx="10424160" cy="1005840"/>
+            <a:off x="548640" y="457200"/>
+            <a:ext cx="8046720" cy="914400"/>
           </a:xfrm>
           <a:prstGeom prst="rect">
             <a:avLst/>
@@ -6271,36 +7103,188 @@
           </a:bodyPr>
           <a:lstStyle/>
           <a:p>
-            <a:pPr algn="l">
+            <a:r>
+              <a:rPr sz="3000" b="1" i="0">
+                <a:solidFill>
+                  <a:srgbClr val="1A3A4A"/>
+                </a:solidFill>
+                <a:latin typeface="Georgia"/>
+              </a:rPr>
+              <a:t>Auch mit nur EINEM Produkt</a:t>
+            </a:r>
+          </a:p>
+        </p:txBody>
+      </p:sp>
+      <p:sp>
+        <p:nvSpPr>
+          <p:cNvPr id="3" name="TextBox 2"/>
+          <p:cNvSpPr txBox="1"/>
+          <p:nvPr/>
+        </p:nvSpPr>
+        <p:spPr>
+          <a:xfrm>
+            <a:off x="548640" y="1234440"/>
+            <a:ext cx="8046720" cy="457200"/>
+          </a:xfrm>
+          <a:prstGeom prst="rect">
+            <a:avLst/>
+          </a:prstGeom>
+          <a:noFill/>
+        </p:spPr>
+        <p:txBody>
+          <a:bodyPr wrap="square" anchor="t" lIns="0" rIns="0" tIns="0" bIns="0">
+            <a:spAutoFit/>
+          </a:bodyPr>
+          <a:lstStyle/>
+          <a:p>
+            <a:r>
+              <a:rPr sz="1300" b="0" i="0">
+                <a:solidFill>
+                  <a:srgbClr val="7A8A95"/>
+                </a:solidFill>
+                <a:latin typeface="Calibri"/>
+              </a:rPr>
+              <a:t>Beispiel Kosmetik — ein Überthema pro Woche:</a:t>
+            </a:r>
+          </a:p>
+        </p:txBody>
+      </p:sp>
+      <p:sp>
+        <p:nvSpPr>
+          <p:cNvPr id="4" name="TextBox 3"/>
+          <p:cNvSpPr txBox="1"/>
+          <p:nvPr/>
+        </p:nvSpPr>
+        <p:spPr>
+          <a:xfrm>
+            <a:off x="548640" y="1783080"/>
+            <a:ext cx="8046720" cy="2788920"/>
+          </a:xfrm>
+          <a:prstGeom prst="rect">
+            <a:avLst/>
+          </a:prstGeom>
+          <a:noFill/>
+        </p:spPr>
+        <p:txBody>
+          <a:bodyPr wrap="square" anchor="t" lIns="0" rIns="0" tIns="0" bIns="0">
+            <a:spAutoFit/>
+          </a:bodyPr>
+          <a:lstStyle/>
+          <a:p>
+            <a:pPr>
               <a:spcBef>
                 <a:spcPts val="0"/>
               </a:spcBef>
               <a:spcAft>
-                <a:spcPts val="1000"/>
+                <a:spcPts val="900"/>
               </a:spcAft>
             </a:pPr>
             <a:r>
-              <a:rPr sz="3200" b="1" i="0">
-                <a:solidFill>
-                  <a:srgbClr val="1F6F6B"/>
-                </a:solidFill>
-                <a:latin typeface="Georgia"/>
-              </a:rPr>
-              <a:t>Auch mit nur EINEM Produkt</a:t>
-            </a:r>
-          </a:p>
-        </p:txBody>
-      </p:sp>
-      <p:sp>
-        <p:nvSpPr>
-          <p:cNvPr id="4" name="TextBox 3"/>
+              <a:rPr sz="1600" b="1" i="0">
+                <a:solidFill>
+                  <a:srgbClr val="DC822E"/>
+                </a:solidFill>
+                <a:latin typeface="Calibri"/>
+              </a:rPr>
+              <a:t>▪  </a:t>
+            </a:r>
+            <a:r>
+              <a:rPr sz="1600" b="0" i="0">
+                <a:solidFill>
+                  <a:srgbClr val="2C3E50"/>
+                </a:solidFill>
+                <a:latin typeface="Calibri"/>
+              </a:rPr>
+              <a:t>Woche 1: Hautpflege</a:t>
+            </a:r>
+          </a:p>
+          <a:p>
+            <a:pPr>
+              <a:spcBef>
+                <a:spcPts val="0"/>
+              </a:spcBef>
+              <a:spcAft>
+                <a:spcPts val="900"/>
+              </a:spcAft>
+            </a:pPr>
+            <a:r>
+              <a:rPr sz="1600" b="1" i="0">
+                <a:solidFill>
+                  <a:srgbClr val="DC822E"/>
+                </a:solidFill>
+                <a:latin typeface="Calibri"/>
+              </a:rPr>
+              <a:t>▪  </a:t>
+            </a:r>
+            <a:r>
+              <a:rPr sz="1600" b="0" i="0">
+                <a:solidFill>
+                  <a:srgbClr val="2C3E50"/>
+                </a:solidFill>
+                <a:latin typeface="Calibri"/>
+              </a:rPr>
+              <a:t>Woche 2: Ernährung für schöne Haut</a:t>
+            </a:r>
+          </a:p>
+          <a:p>
+            <a:pPr>
+              <a:spcBef>
+                <a:spcPts val="0"/>
+              </a:spcBef>
+              <a:spcAft>
+                <a:spcPts val="900"/>
+              </a:spcAft>
+            </a:pPr>
+            <a:r>
+              <a:rPr sz="1600" b="1" i="0">
+                <a:solidFill>
+                  <a:srgbClr val="DC822E"/>
+                </a:solidFill>
+                <a:latin typeface="Calibri"/>
+              </a:rPr>
+              <a:t>▪  </a:t>
+            </a:r>
+            <a:r>
+              <a:rPr sz="1600" b="0" i="0">
+                <a:solidFill>
+                  <a:srgbClr val="2C3E50"/>
+                </a:solidFill>
+                <a:latin typeface="Calibri"/>
+              </a:rPr>
+              <a:t>Woche 3: Routine</a:t>
+            </a:r>
+          </a:p>
+          <a:p>
+            <a:pPr>
+              <a:spcBef>
+                <a:spcPts val="0"/>
+              </a:spcBef>
+              <a:spcAft>
+                <a:spcPts val="800"/>
+              </a:spcAft>
+            </a:pPr>
+            <a:r>
+              <a:rPr sz="1400" b="0" i="1">
+                <a:solidFill>
+                  <a:srgbClr val="7A8A95"/>
+                </a:solidFill>
+                <a:latin typeface="Calibri"/>
+              </a:rPr>
+              <a:t>Aus 1 Produkt ein ganzes Jahr voller Themen.</a:t>
+            </a:r>
+          </a:p>
+        </p:txBody>
+      </p:sp>
+      <p:sp>
+        <p:nvSpPr>
+          <p:cNvPr id="5" name="TextBox 4"/>
           <p:cNvSpPr txBox="1"/>
           <p:nvPr/>
         </p:nvSpPr>
         <p:spPr>
           <a:xfrm>
-            <a:off x="868680" y="1783080"/>
-            <a:ext cx="10424160" cy="4572000"/>
+            <a:off x="457200" y="4754880"/>
+            <a:ext cx="5486400" cy="274320"/>
           </a:xfrm>
           <a:prstGeom prst="rect">
             <a:avLst/>
@@ -6313,98 +7297,49 @@
           </a:bodyPr>
           <a:lstStyle/>
           <a:p>
-            <a:pPr algn="l">
-              <a:spcBef>
-                <a:spcPts val="0"/>
-              </a:spcBef>
-              <a:spcAft>
-                <a:spcPts val="1400"/>
-              </a:spcAft>
-            </a:pPr>
-            <a:r>
-              <a:rPr sz="2100" b="0" i="0">
-                <a:solidFill>
-                  <a:srgbClr val="2A2A2A"/>
+            <a:r>
+              <a:rPr sz="900" b="0" i="0">
+                <a:solidFill>
+                  <a:srgbClr val="7A8A95"/>
                 </a:solidFill>
                 <a:latin typeface="Calibri"/>
               </a:rPr>
-              <a:t>Beispiel Kosmetik — ein Überthema pro Woche:</a:t>
-            </a:r>
-          </a:p>
-          <a:p>
-            <a:pPr algn="l">
-              <a:spcBef>
-                <a:spcPts val="0"/>
-              </a:spcBef>
-              <a:spcAft>
-                <a:spcPts val="1400"/>
-              </a:spcAft>
-            </a:pPr>
-            <a:r>
-              <a:rPr sz="2100" b="0" i="0">
-                <a:solidFill>
-                  <a:srgbClr val="2A2A2A"/>
+              <a:t>Mama-CEO · Säule 3 · Lektion 3.3</a:t>
+            </a:r>
+          </a:p>
+        </p:txBody>
+      </p:sp>
+      <p:sp>
+        <p:nvSpPr>
+          <p:cNvPr id="6" name="TextBox 5"/>
+          <p:cNvSpPr txBox="1"/>
+          <p:nvPr/>
+        </p:nvSpPr>
+        <p:spPr>
+          <a:xfrm>
+            <a:off x="6400800" y="4754880"/>
+            <a:ext cx="2286000" cy="274320"/>
+          </a:xfrm>
+          <a:prstGeom prst="rect">
+            <a:avLst/>
+          </a:prstGeom>
+          <a:noFill/>
+        </p:spPr>
+        <p:txBody>
+          <a:bodyPr wrap="square" anchor="t" lIns="0" rIns="0" tIns="0" bIns="0">
+            <a:spAutoFit/>
+          </a:bodyPr>
+          <a:lstStyle/>
+          <a:p>
+            <a:pPr algn="r"/>
+            <a:r>
+              <a:rPr sz="900" b="0" i="0">
+                <a:solidFill>
+                  <a:srgbClr val="7A8A95"/>
                 </a:solidFill>
                 <a:latin typeface="Calibri"/>
               </a:rPr>
-              <a:t>Woche 1: Hautpflege</a:t>
-            </a:r>
-          </a:p>
-          <a:p>
-            <a:pPr algn="l">
-              <a:spcBef>
-                <a:spcPts val="0"/>
-              </a:spcBef>
-              <a:spcAft>
-                <a:spcPts val="1400"/>
-              </a:spcAft>
-            </a:pPr>
-            <a:r>
-              <a:rPr sz="2100" b="0" i="0">
-                <a:solidFill>
-                  <a:srgbClr val="2A2A2A"/>
-                </a:solidFill>
-                <a:latin typeface="Calibri"/>
-              </a:rPr>
-              <a:t>Woche 2: Ernährung für schöne Haut</a:t>
-            </a:r>
-          </a:p>
-          <a:p>
-            <a:pPr algn="l">
-              <a:spcBef>
-                <a:spcPts val="0"/>
-              </a:spcBef>
-              <a:spcAft>
-                <a:spcPts val="1400"/>
-              </a:spcAft>
-            </a:pPr>
-            <a:r>
-              <a:rPr sz="2100" b="0" i="0">
-                <a:solidFill>
-                  <a:srgbClr val="2A2A2A"/>
-                </a:solidFill>
-                <a:latin typeface="Calibri"/>
-              </a:rPr>
-              <a:t>Woche 3: Routine</a:t>
-            </a:r>
-          </a:p>
-          <a:p>
-            <a:pPr algn="l">
-              <a:spcBef>
-                <a:spcPts val="0"/>
-              </a:spcBef>
-              <a:spcAft>
-                <a:spcPts val="1400"/>
-              </a:spcAft>
-            </a:pPr>
-            <a:r>
-              <a:rPr sz="2000" b="0" i="1">
-                <a:solidFill>
-                  <a:srgbClr val="6E6E6E"/>
-                </a:solidFill>
-                <a:latin typeface="Calibri"/>
-              </a:rPr>
-              <a:t>Aus 1 Produkt ein ganzes Jahr voller Themen.</a:t>
+              <a:t>Mum Life Balance</a:t>
             </a:r>
           </a:p>
         </p:txBody>
@@ -6437,58 +7372,14 @@
       <p:grpSpPr/>
       <p:sp>
         <p:nvSpPr>
-          <p:cNvPr id="2" name="Rectangle 1"/>
-          <p:cNvSpPr/>
-          <p:nvPr/>
-        </p:nvSpPr>
-        <p:spPr>
-          <a:xfrm>
-            <a:off x="548640" y="502920"/>
-            <a:ext cx="201168" cy="201168"/>
-          </a:xfrm>
-          <a:prstGeom prst="rect">
-            <a:avLst/>
-          </a:prstGeom>
-          <a:solidFill>
-            <a:srgbClr val="1F6F6B"/>
-          </a:solidFill>
-          <a:ln>
-            <a:noFill/>
-          </a:ln>
-          <a:effectLst/>
-        </p:spPr>
-        <p:style>
-          <a:lnRef idx="1">
-            <a:schemeClr val="accent1"/>
-          </a:lnRef>
-          <a:fillRef idx="3">
-            <a:schemeClr val="accent1"/>
-          </a:fillRef>
-          <a:effectRef idx="2">
-            <a:schemeClr val="accent1"/>
-          </a:effectRef>
-          <a:fontRef idx="minor">
-            <a:schemeClr val="lt1"/>
-          </a:fontRef>
-        </p:style>
-        <p:txBody>
-          <a:bodyPr rtlCol="0" anchor="ctr"/>
-          <a:lstStyle/>
-          <a:p>
-            <a:pPr algn="ctr"/>
-          </a:p>
-        </p:txBody>
-      </p:sp>
-      <p:sp>
-        <p:nvSpPr>
-          <p:cNvPr id="3" name="TextBox 2"/>
+          <p:cNvPr id="2" name="TextBox 1"/>
           <p:cNvSpPr txBox="1"/>
           <p:nvPr/>
         </p:nvSpPr>
         <p:spPr>
           <a:xfrm>
-            <a:off x="868680" y="457200"/>
-            <a:ext cx="10424160" cy="1005840"/>
+            <a:off x="548640" y="457200"/>
+            <a:ext cx="8046720" cy="914400"/>
           </a:xfrm>
           <a:prstGeom prst="rect">
             <a:avLst/>
@@ -6501,22 +7392,140 @@
           </a:bodyPr>
           <a:lstStyle/>
           <a:p>
-            <a:pPr algn="l">
+            <a:r>
+              <a:rPr sz="3000" b="1" i="0">
+                <a:solidFill>
+                  <a:srgbClr val="1A3A4A"/>
+                </a:solidFill>
+                <a:latin typeface="Georgia"/>
+              </a:rPr>
+              <a:t>Fixpunkte ZUERST eintragen</a:t>
+            </a:r>
+          </a:p>
+        </p:txBody>
+      </p:sp>
+      <p:sp>
+        <p:nvSpPr>
+          <p:cNvPr id="3" name="TextBox 2"/>
+          <p:cNvSpPr txBox="1"/>
+          <p:nvPr/>
+        </p:nvSpPr>
+        <p:spPr>
+          <a:xfrm>
+            <a:off x="548640" y="1417320"/>
+            <a:ext cx="8046720" cy="3154680"/>
+          </a:xfrm>
+          <a:prstGeom prst="rect">
+            <a:avLst/>
+          </a:prstGeom>
+          <a:noFill/>
+        </p:spPr>
+        <p:txBody>
+          <a:bodyPr wrap="square" anchor="t" lIns="0" rIns="0" tIns="0" bIns="0">
+            <a:spAutoFit/>
+          </a:bodyPr>
+          <a:lstStyle/>
+          <a:p>
+            <a:pPr>
               <a:spcBef>
                 <a:spcPts val="0"/>
               </a:spcBef>
               <a:spcAft>
-                <a:spcPts val="1000"/>
+                <a:spcPts val="900"/>
               </a:spcAft>
             </a:pPr>
             <a:r>
-              <a:rPr sz="3200" b="1" i="0">
-                <a:solidFill>
-                  <a:srgbClr val="1F6F6B"/>
-                </a:solidFill>
-                <a:latin typeface="Georgia"/>
-              </a:rPr>
-              <a:t>Fixpunkte ZUERST eintragen</a:t>
+              <a:rPr sz="1600" b="1" i="0">
+                <a:solidFill>
+                  <a:srgbClr val="DC822E"/>
+                </a:solidFill>
+                <a:latin typeface="Calibri"/>
+              </a:rPr>
+              <a:t>▪  </a:t>
+            </a:r>
+            <a:r>
+              <a:rPr sz="1600" b="0" i="0">
+                <a:solidFill>
+                  <a:srgbClr val="2C3E50"/>
+                </a:solidFill>
+                <a:latin typeface="Calibri"/>
+              </a:rPr>
+              <a:t>Schulferien</a:t>
+            </a:r>
+          </a:p>
+          <a:p>
+            <a:pPr>
+              <a:spcBef>
+                <a:spcPts val="0"/>
+              </a:spcBef>
+              <a:spcAft>
+                <a:spcPts val="900"/>
+              </a:spcAft>
+            </a:pPr>
+            <a:r>
+              <a:rPr sz="1600" b="1" i="0">
+                <a:solidFill>
+                  <a:srgbClr val="DC822E"/>
+                </a:solidFill>
+                <a:latin typeface="Calibri"/>
+              </a:rPr>
+              <a:t>▪  </a:t>
+            </a:r>
+            <a:r>
+              <a:rPr sz="1600" b="0" i="0">
+                <a:solidFill>
+                  <a:srgbClr val="2C3E50"/>
+                </a:solidFill>
+                <a:latin typeface="Calibri"/>
+              </a:rPr>
+              <a:t>Testwochen</a:t>
+            </a:r>
+          </a:p>
+          <a:p>
+            <a:pPr>
+              <a:spcBef>
+                <a:spcPts val="0"/>
+              </a:spcBef>
+              <a:spcAft>
+                <a:spcPts val="900"/>
+              </a:spcAft>
+            </a:pPr>
+            <a:r>
+              <a:rPr sz="1600" b="1" i="0">
+                <a:solidFill>
+                  <a:srgbClr val="DC822E"/>
+                </a:solidFill>
+                <a:latin typeface="Calibri"/>
+              </a:rPr>
+              <a:t>▪  </a:t>
+            </a:r>
+            <a:r>
+              <a:rPr sz="1600" b="0" i="0">
+                <a:solidFill>
+                  <a:srgbClr val="2C3E50"/>
+                </a:solidFill>
+                <a:latin typeface="Calibri"/>
+              </a:rPr>
+              <a:t>Anlässe &amp; Events</a:t>
+            </a:r>
+          </a:p>
+          <a:p>
+            <a:pPr>
+              <a:spcBef>
+                <a:spcPts val="0"/>
+              </a:spcBef>
+              <a:spcAft>
+                <a:spcPts val="800"/>
+              </a:spcAft>
+            </a:pPr>
+            <a:r>
+              <a:rPr sz="1400" b="0" i="1">
+                <a:solidFill>
+                  <a:srgbClr val="7A8A95"/>
+                </a:solidFill>
+                <a:latin typeface="Calibri"/>
+              </a:rPr>
+              <a:t>Eine Woche vorher drüber reden + einladen. Alles andere baut sich drumherum.</a:t>
             </a:r>
           </a:p>
         </p:txBody>
@@ -6529,8 +7538,8 @@
         </p:nvSpPr>
         <p:spPr>
           <a:xfrm>
-            <a:off x="868680" y="1783080"/>
-            <a:ext cx="10424160" cy="4572000"/>
+            <a:off x="457200" y="4754880"/>
+            <a:ext cx="5486400" cy="274320"/>
           </a:xfrm>
           <a:prstGeom prst="rect">
             <a:avLst/>
@@ -6543,79 +7552,49 @@
           </a:bodyPr>
           <a:lstStyle/>
           <a:p>
-            <a:pPr algn="l">
-              <a:spcBef>
-                <a:spcPts val="0"/>
-              </a:spcBef>
-              <a:spcAft>
-                <a:spcPts val="1400"/>
-              </a:spcAft>
-            </a:pPr>
-            <a:r>
-              <a:rPr sz="2100" b="0" i="0">
-                <a:solidFill>
-                  <a:srgbClr val="2A2A2A"/>
+            <a:r>
+              <a:rPr sz="900" b="0" i="0">
+                <a:solidFill>
+                  <a:srgbClr val="7A8A95"/>
                 </a:solidFill>
                 <a:latin typeface="Calibri"/>
               </a:rPr>
-              <a:t>Schulferien</a:t>
-            </a:r>
-          </a:p>
-          <a:p>
-            <a:pPr algn="l">
-              <a:spcBef>
-                <a:spcPts val="0"/>
-              </a:spcBef>
-              <a:spcAft>
-                <a:spcPts val="1400"/>
-              </a:spcAft>
-            </a:pPr>
-            <a:r>
-              <a:rPr sz="2100" b="0" i="0">
-                <a:solidFill>
-                  <a:srgbClr val="2A2A2A"/>
+              <a:t>Mama-CEO · Säule 3 · Lektion 3.3</a:t>
+            </a:r>
+          </a:p>
+        </p:txBody>
+      </p:sp>
+      <p:sp>
+        <p:nvSpPr>
+          <p:cNvPr id="5" name="TextBox 4"/>
+          <p:cNvSpPr txBox="1"/>
+          <p:nvPr/>
+        </p:nvSpPr>
+        <p:spPr>
+          <a:xfrm>
+            <a:off x="6400800" y="4754880"/>
+            <a:ext cx="2286000" cy="274320"/>
+          </a:xfrm>
+          <a:prstGeom prst="rect">
+            <a:avLst/>
+          </a:prstGeom>
+          <a:noFill/>
+        </p:spPr>
+        <p:txBody>
+          <a:bodyPr wrap="square" anchor="t" lIns="0" rIns="0" tIns="0" bIns="0">
+            <a:spAutoFit/>
+          </a:bodyPr>
+          <a:lstStyle/>
+          <a:p>
+            <a:pPr algn="r"/>
+            <a:r>
+              <a:rPr sz="900" b="0" i="0">
+                <a:solidFill>
+                  <a:srgbClr val="7A8A95"/>
                 </a:solidFill>
                 <a:latin typeface="Calibri"/>
               </a:rPr>
-              <a:t>Testwochen</a:t>
-            </a:r>
-          </a:p>
-          <a:p>
-            <a:pPr algn="l">
-              <a:spcBef>
-                <a:spcPts val="0"/>
-              </a:spcBef>
-              <a:spcAft>
-                <a:spcPts val="1400"/>
-              </a:spcAft>
-            </a:pPr>
-            <a:r>
-              <a:rPr sz="2100" b="0" i="0">
-                <a:solidFill>
-                  <a:srgbClr val="2A2A2A"/>
-                </a:solidFill>
-                <a:latin typeface="Calibri"/>
-              </a:rPr>
-              <a:t>Anlässe &amp; Events</a:t>
-            </a:r>
-          </a:p>
-          <a:p>
-            <a:pPr algn="l">
-              <a:spcBef>
-                <a:spcPts val="0"/>
-              </a:spcBef>
-              <a:spcAft>
-                <a:spcPts val="1400"/>
-              </a:spcAft>
-            </a:pPr>
-            <a:r>
-              <a:rPr sz="2000" b="0" i="1">
-                <a:solidFill>
-                  <a:srgbClr val="6E6E6E"/>
-                </a:solidFill>
-                <a:latin typeface="Calibri"/>
-              </a:rPr>
-              <a:t>Eine Woche vorher drüber reden + einladen. Alles andere baut sich drumherum.</a:t>
+              <a:t>Mum Life Balance</a:t>
             </a:r>
           </a:p>
         </p:txBody>
